--- a/final coffee_production databse/Coffee data base_Group5 (1).pptx
+++ b/final coffee_production databse/Coffee data base_Group5 (1).pptx
@@ -1,22 +1,22 @@
 
 <file path=ppt/presentation.xml><?xml version="1.0" encoding="utf-8"?>
-<p:presentation xmlns:a="http://schemas.openxmlformats.org/drawingml/2006/main" xmlns:r="http://schemas.openxmlformats.org/officeDocument/2006/relationships" xmlns:p="http://schemas.openxmlformats.org/presentationml/2006/main" saveSubsetFonts="1" autoCompressPictures="0">
+<p:presentation xmlns:a="http://schemas.openxmlformats.org/drawingml/2006/main" xmlns:r="http://schemas.openxmlformats.org/officeDocument/2006/relationships" xmlns:p="http://schemas.openxmlformats.org/presentationml/2006/main" autoCompressPictures="0">
   <p:sldMasterIdLst>
     <p:sldMasterId id="2147483648" r:id="rId1"/>
   </p:sldMasterIdLst>
   <p:notesMasterIdLst>
-    <p:notesMasterId r:id="rId11"/>
+    <p:notesMasterId r:id="rId4"/>
   </p:notesMasterIdLst>
   <p:sldIdLst>
-    <p:sldId id="256" r:id="rId2"/>
-    <p:sldId id="258" r:id="rId3"/>
-    <p:sldId id="259" r:id="rId4"/>
-    <p:sldId id="260" r:id="rId5"/>
-    <p:sldId id="261" r:id="rId6"/>
-    <p:sldId id="262" r:id="rId7"/>
-    <p:sldId id="263" r:id="rId8"/>
-    <p:sldId id="264" r:id="rId9"/>
-    <p:sldId id="265" r:id="rId10"/>
+    <p:sldId id="256" r:id="rId3"/>
+    <p:sldId id="258" r:id="rId5"/>
+    <p:sldId id="259" r:id="rId6"/>
+    <p:sldId id="260" r:id="rId7"/>
+    <p:sldId id="261" r:id="rId8"/>
+    <p:sldId id="262" r:id="rId9"/>
+    <p:sldId id="263" r:id="rId10"/>
+    <p:sldId id="264" r:id="rId11"/>
+    <p:sldId id="265" r:id="rId12"/>
   </p:sldIdLst>
   <p:sldSz cx="9144000" cy="5143500" type="screen16x9"/>
   <p:notesSz cx="5143500" cy="9144000"/>
@@ -112,11 +112,6 @@
       </a:defRPr>
     </a:lvl9pPr>
   </p:defaultTextStyle>
-  <p:extLst>
-    <p:ext uri="{EFAFB233-063F-42B5-8137-9DF3F51BA10A}">
-      <p15:sldGuideLst xmlns:p15="http://schemas.microsoft.com/office/powerpoint/2012/main"/>
-    </p:ext>
-  </p:extLst>
 </p:presentation>
 </file>
 
@@ -143,11 +138,6 @@
         </a:xfrm>
       </p:grpSpPr>
     </p:spTree>
-    <p:extLst>
-      <p:ext uri="{BB962C8B-B14F-4D97-AF65-F5344CB8AC3E}">
-        <p14:creationId xmlns:p14="http://schemas.microsoft.com/office/powerpoint/2010/main" val="139195936"/>
-      </p:ext>
-    </p:extLst>
   </p:cSld>
   <p:clrMap bg1="lt1" tx1="dk1" bg2="lt2" tx2="dk2" accent1="accent1" accent2="accent2" accent3="accent3" accent4="accent4" accent5="accent5" accent6="accent6" hlink="hlink" folHlink="folHlink"/>
   <p:notesStyle>
@@ -310,18 +300,12 @@
           <a:p>
             <a:fld id="{F7021451-1387-4CA6-816F-3879F97B5CBC}" type="slidenum">
               <a:rPr lang="en-US"/>
-              <a:t>1</a:t>
             </a:fld>
             <a:endParaRPr lang="en-US"/>
           </a:p>
         </p:txBody>
       </p:sp>
     </p:spTree>
-    <p:extLst>
-      <p:ext uri="{BB962C8B-B14F-4D97-AF65-F5344CB8AC3E}">
-        <p14:creationId xmlns:p14="http://schemas.microsoft.com/office/powerpoint/2010/main" val="1024086991"/>
-      </p:ext>
-    </p:extLst>
   </p:cSld>
   <p:clrMapOvr>
     <a:masterClrMapping/>
@@ -394,18 +378,12 @@
           <a:p>
             <a:fld id="{F7021451-1387-4CA6-816F-3879F97B5CBC}" type="slidenum">
               <a:rPr lang="en-US"/>
-              <a:t>2</a:t>
             </a:fld>
             <a:endParaRPr lang="en-US"/>
           </a:p>
         </p:txBody>
       </p:sp>
     </p:spTree>
-    <p:extLst>
-      <p:ext uri="{BB962C8B-B14F-4D97-AF65-F5344CB8AC3E}">
-        <p14:creationId xmlns:p14="http://schemas.microsoft.com/office/powerpoint/2010/main" val="1024086991"/>
-      </p:ext>
-    </p:extLst>
   </p:cSld>
   <p:clrMapOvr>
     <a:masterClrMapping/>
@@ -478,18 +456,12 @@
           <a:p>
             <a:fld id="{F7021451-1387-4CA6-816F-3879F97B5CBC}" type="slidenum">
               <a:rPr lang="en-US"/>
-              <a:t>3</a:t>
             </a:fld>
             <a:endParaRPr lang="en-US"/>
           </a:p>
         </p:txBody>
       </p:sp>
     </p:spTree>
-    <p:extLst>
-      <p:ext uri="{BB962C8B-B14F-4D97-AF65-F5344CB8AC3E}">
-        <p14:creationId xmlns:p14="http://schemas.microsoft.com/office/powerpoint/2010/main" val="1024086991"/>
-      </p:ext>
-    </p:extLst>
   </p:cSld>
   <p:clrMapOvr>
     <a:masterClrMapping/>
@@ -562,18 +534,12 @@
           <a:p>
             <a:fld id="{F7021451-1387-4CA6-816F-3879F97B5CBC}" type="slidenum">
               <a:rPr lang="en-US"/>
-              <a:t>4</a:t>
             </a:fld>
             <a:endParaRPr lang="en-US"/>
           </a:p>
         </p:txBody>
       </p:sp>
     </p:spTree>
-    <p:extLst>
-      <p:ext uri="{BB962C8B-B14F-4D97-AF65-F5344CB8AC3E}">
-        <p14:creationId xmlns:p14="http://schemas.microsoft.com/office/powerpoint/2010/main" val="1024086991"/>
-      </p:ext>
-    </p:extLst>
   </p:cSld>
   <p:clrMapOvr>
     <a:masterClrMapping/>
@@ -646,18 +612,12 @@
           <a:p>
             <a:fld id="{F7021451-1387-4CA6-816F-3879F97B5CBC}" type="slidenum">
               <a:rPr lang="en-US"/>
-              <a:t>5</a:t>
             </a:fld>
             <a:endParaRPr lang="en-US"/>
           </a:p>
         </p:txBody>
       </p:sp>
     </p:spTree>
-    <p:extLst>
-      <p:ext uri="{BB962C8B-B14F-4D97-AF65-F5344CB8AC3E}">
-        <p14:creationId xmlns:p14="http://schemas.microsoft.com/office/powerpoint/2010/main" val="1024086991"/>
-      </p:ext>
-    </p:extLst>
   </p:cSld>
   <p:clrMapOvr>
     <a:masterClrMapping/>
@@ -730,18 +690,12 @@
           <a:p>
             <a:fld id="{F7021451-1387-4CA6-816F-3879F97B5CBC}" type="slidenum">
               <a:rPr lang="en-US"/>
-              <a:t>6</a:t>
             </a:fld>
             <a:endParaRPr lang="en-US"/>
           </a:p>
         </p:txBody>
       </p:sp>
     </p:spTree>
-    <p:extLst>
-      <p:ext uri="{BB962C8B-B14F-4D97-AF65-F5344CB8AC3E}">
-        <p14:creationId xmlns:p14="http://schemas.microsoft.com/office/powerpoint/2010/main" val="1024086991"/>
-      </p:ext>
-    </p:extLst>
   </p:cSld>
   <p:clrMapOvr>
     <a:masterClrMapping/>
@@ -814,18 +768,12 @@
           <a:p>
             <a:fld id="{F7021451-1387-4CA6-816F-3879F97B5CBC}" type="slidenum">
               <a:rPr lang="en-US"/>
-              <a:t>7</a:t>
             </a:fld>
             <a:endParaRPr lang="en-US"/>
           </a:p>
         </p:txBody>
       </p:sp>
     </p:spTree>
-    <p:extLst>
-      <p:ext uri="{BB962C8B-B14F-4D97-AF65-F5344CB8AC3E}">
-        <p14:creationId xmlns:p14="http://schemas.microsoft.com/office/powerpoint/2010/main" val="1024086991"/>
-      </p:ext>
-    </p:extLst>
   </p:cSld>
   <p:clrMapOvr>
     <a:masterClrMapping/>
@@ -898,18 +846,12 @@
           <a:p>
             <a:fld id="{F7021451-1387-4CA6-816F-3879F97B5CBC}" type="slidenum">
               <a:rPr lang="en-US"/>
-              <a:t>8</a:t>
             </a:fld>
             <a:endParaRPr lang="en-US"/>
           </a:p>
         </p:txBody>
       </p:sp>
     </p:spTree>
-    <p:extLst>
-      <p:ext uri="{BB962C8B-B14F-4D97-AF65-F5344CB8AC3E}">
-        <p14:creationId xmlns:p14="http://schemas.microsoft.com/office/powerpoint/2010/main" val="1024086991"/>
-      </p:ext>
-    </p:extLst>
   </p:cSld>
   <p:clrMapOvr>
     <a:masterClrMapping/>
@@ -982,18 +924,12 @@
           <a:p>
             <a:fld id="{F7021451-1387-4CA6-816F-3879F97B5CBC}" type="slidenum">
               <a:rPr lang="en-US"/>
-              <a:t>9</a:t>
             </a:fld>
             <a:endParaRPr lang="en-US"/>
           </a:p>
         </p:txBody>
       </p:sp>
     </p:spTree>
-    <p:extLst>
-      <p:ext uri="{BB962C8B-B14F-4D97-AF65-F5344CB8AC3E}">
-        <p14:creationId xmlns:p14="http://schemas.microsoft.com/office/powerpoint/2010/main" val="1024086991"/>
-      </p:ext>
-    </p:extLst>
   </p:cSld>
   <p:clrMapOvr>
     <a:masterClrMapping/>
@@ -1082,7 +1018,7 @@
         <a:spcBef>
           <a:spcPct val="20000"/>
         </a:spcBef>
-        <a:buFont typeface="Arial" pitchFamily="34" charset="0"/>
+        <a:buFont typeface="Arial" panose="020B0604020202020204" pitchFamily="34" charset="0"/>
         <a:buChar char="•"/>
         <a:defRPr sz="3200" kern="1200">
           <a:solidFill>
@@ -1097,7 +1033,7 @@
         <a:spcBef>
           <a:spcPct val="20000"/>
         </a:spcBef>
-        <a:buFont typeface="Arial" pitchFamily="34" charset="0"/>
+        <a:buFont typeface="Arial" panose="020B0604020202020204" pitchFamily="34" charset="0"/>
         <a:buChar char="–"/>
         <a:defRPr sz="2800" kern="1200">
           <a:solidFill>
@@ -1112,7 +1048,7 @@
         <a:spcBef>
           <a:spcPct val="20000"/>
         </a:spcBef>
-        <a:buFont typeface="Arial" pitchFamily="34" charset="0"/>
+        <a:buFont typeface="Arial" panose="020B0604020202020204" pitchFamily="34" charset="0"/>
         <a:buChar char="•"/>
         <a:defRPr sz="2400" kern="1200">
           <a:solidFill>
@@ -1127,7 +1063,7 @@
         <a:spcBef>
           <a:spcPct val="20000"/>
         </a:spcBef>
-        <a:buFont typeface="Arial" pitchFamily="34" charset="0"/>
+        <a:buFont typeface="Arial" panose="020B0604020202020204" pitchFamily="34" charset="0"/>
         <a:buChar char="–"/>
         <a:defRPr sz="2000" kern="1200">
           <a:solidFill>
@@ -1142,7 +1078,7 @@
         <a:spcBef>
           <a:spcPct val="20000"/>
         </a:spcBef>
-        <a:buFont typeface="Arial" pitchFamily="34" charset="0"/>
+        <a:buFont typeface="Arial" panose="020B0604020202020204" pitchFamily="34" charset="0"/>
         <a:buChar char="»"/>
         <a:defRPr sz="2000" kern="1200">
           <a:solidFill>
@@ -1157,7 +1093,7 @@
         <a:spcBef>
           <a:spcPct val="20000"/>
         </a:spcBef>
-        <a:buFont typeface="Arial" pitchFamily="34" charset="0"/>
+        <a:buFont typeface="Arial" panose="020B0604020202020204" pitchFamily="34" charset="0"/>
         <a:buChar char="•"/>
         <a:defRPr sz="2000" kern="1200">
           <a:solidFill>
@@ -1172,7 +1108,7 @@
         <a:spcBef>
           <a:spcPct val="20000"/>
         </a:spcBef>
-        <a:buFont typeface="Arial" pitchFamily="34" charset="0"/>
+        <a:buFont typeface="Arial" panose="020B0604020202020204" pitchFamily="34" charset="0"/>
         <a:buChar char="•"/>
         <a:defRPr sz="2000" kern="1200">
           <a:solidFill>
@@ -1187,7 +1123,7 @@
         <a:spcBef>
           <a:spcPct val="20000"/>
         </a:spcBef>
-        <a:buFont typeface="Arial" pitchFamily="34" charset="0"/>
+        <a:buFont typeface="Arial" panose="020B0604020202020204" pitchFamily="34" charset="0"/>
         <a:buChar char="•"/>
         <a:defRPr sz="2000" kern="1200">
           <a:solidFill>
@@ -1202,7 +1138,7 @@
         <a:spcBef>
           <a:spcPct val="20000"/>
         </a:spcBef>
-        <a:buFont typeface="Arial" pitchFamily="34" charset="0"/>
+        <a:buFont typeface="Arial" panose="020B0604020202020204" pitchFamily="34" charset="0"/>
         <a:buChar char="•"/>
         <a:defRPr sz="2000" kern="1200">
           <a:solidFill>
@@ -1315,7 +1251,7 @@
 
 <file path=ppt/slides/slide1.xml><?xml version="1.0" encoding="utf-8"?>
 <p:sld xmlns:a="http://schemas.openxmlformats.org/drawingml/2006/main" xmlns:r="http://schemas.openxmlformats.org/officeDocument/2006/relationships" xmlns:p="http://schemas.openxmlformats.org/presentationml/2006/main">
-  <p:cSld name="Slide 1">
+  <p:cSld>
     <p:bg>
       <p:bgPr>
         <a:solidFill>
@@ -1428,7 +1364,6 @@
             <a:avLst/>
           </a:prstGeom>
           <a:noFill/>
-          <a:ln/>
         </p:spPr>
         <p:txBody>
           <a:bodyPr wrap="square" rtlCol="0" anchor="ctr"/>
@@ -1442,9 +1377,9 @@
                 <a:solidFill>
                   <a:srgbClr val="FFFFFF"/>
                 </a:solidFill>
-                <a:latin typeface="Trebuchet MS" pitchFamily="34" charset="0"/>
-                <a:ea typeface="Trebuchet MS" pitchFamily="34" charset="-122"/>
-                <a:cs typeface="Trebuchet MS" pitchFamily="34" charset="-120"/>
+                <a:latin typeface="Trebuchet MS" panose="020B0603020202020204" pitchFamily="34" charset="0"/>
+                <a:ea typeface="Trebuchet MS" panose="020B0603020202020204" pitchFamily="34" charset="-122"/>
+                <a:cs typeface="Trebuchet MS" panose="020B0603020202020204" pitchFamily="34" charset="-120"/>
               </a:rPr>
               <a:t>Coffee Production</a:t>
             </a:r>
@@ -1459,9 +1394,9 @@
                 <a:solidFill>
                   <a:srgbClr val="FFFFFF"/>
                 </a:solidFill>
-                <a:latin typeface="Trebuchet MS" pitchFamily="34" charset="0"/>
-                <a:ea typeface="Trebuchet MS" pitchFamily="34" charset="-122"/>
-                <a:cs typeface="Trebuchet MS" pitchFamily="34" charset="-120"/>
+                <a:latin typeface="Trebuchet MS" panose="020B0603020202020204" pitchFamily="34" charset="0"/>
+                <a:ea typeface="Trebuchet MS" panose="020B0603020202020204" pitchFamily="34" charset="-122"/>
+                <a:cs typeface="Trebuchet MS" panose="020B0603020202020204" pitchFamily="34" charset="-120"/>
               </a:rPr>
               <a:t>Database System</a:t>
             </a:r>
@@ -1484,7 +1419,6 @@
             <a:avLst/>
           </a:prstGeom>
           <a:noFill/>
-          <a:ln/>
         </p:spPr>
         <p:txBody>
           <a:bodyPr wrap="square" rtlCol="0" anchor="ctr"/>
@@ -1498,9 +1432,9 @@
                 <a:solidFill>
                   <a:srgbClr val="8FAF72"/>
                 </a:solidFill>
-                <a:latin typeface="Calibri" pitchFamily="34" charset="0"/>
-                <a:ea typeface="Calibri" pitchFamily="34" charset="-122"/>
-                <a:cs typeface="Calibri" pitchFamily="34" charset="-120"/>
+                <a:latin typeface="Calibri" panose="020F0502020204030204" pitchFamily="34" charset="0"/>
+                <a:ea typeface="Calibri" panose="020F0502020204030204" pitchFamily="34" charset="-122"/>
+                <a:cs typeface="Calibri" panose="020F0502020204030204" pitchFamily="34" charset="-120"/>
               </a:rPr>
               <a:t>Digitizing Agricultural Data for the Ministry of Agriculture</a:t>
             </a:r>
@@ -1523,7 +1457,6 @@
             <a:avLst/>
           </a:prstGeom>
           <a:noFill/>
-          <a:ln/>
         </p:spPr>
         <p:txBody>
           <a:bodyPr wrap="square" rtlCol="0" anchor="ctr"/>
@@ -1537,9 +1470,9 @@
                 <a:solidFill>
                   <a:srgbClr val="8FAF72"/>
                 </a:solidFill>
-                <a:latin typeface="Calibri" pitchFamily="34" charset="0"/>
-                <a:ea typeface="Calibri" pitchFamily="34" charset="-122"/>
-                <a:cs typeface="Calibri" pitchFamily="34" charset="-120"/>
+                <a:latin typeface="Calibri" panose="020F0502020204030204" pitchFamily="34" charset="0"/>
+                <a:ea typeface="Calibri" panose="020F0502020204030204" pitchFamily="34" charset="-122"/>
+                <a:cs typeface="Calibri" panose="020F0502020204030204" pitchFamily="34" charset="-120"/>
               </a:rPr>
               <a:t>Group 5  ·  Final Project  ·  Database Systems</a:t>
             </a:r>
@@ -1562,7 +1495,6 @@
             <a:avLst/>
           </a:prstGeom>
           <a:noFill/>
-          <a:ln/>
         </p:spPr>
         <p:txBody>
           <a:bodyPr wrap="square" rtlCol="0" anchor="ctr"/>
@@ -1576,9 +1508,9 @@
                 <a:solidFill>
                   <a:srgbClr val="8FAF72"/>
                 </a:solidFill>
-                <a:latin typeface="Calibri" pitchFamily="34" charset="0"/>
-                <a:ea typeface="Calibri" pitchFamily="34" charset="-122"/>
-                <a:cs typeface="Calibri" pitchFamily="34" charset="-120"/>
+                <a:latin typeface="Calibri" panose="020F0502020204030204" pitchFamily="34" charset="0"/>
+                <a:ea typeface="Calibri" panose="020F0502020204030204" pitchFamily="34" charset="-122"/>
+                <a:cs typeface="Calibri" panose="020F0502020204030204" pitchFamily="34" charset="-120"/>
               </a:rPr>
               <a:t>1 / 10</a:t>
             </a:r>
@@ -1596,7 +1528,7 @@
 
 <file path=ppt/slides/slide2.xml><?xml version="1.0" encoding="utf-8"?>
 <p:sld xmlns:a="http://schemas.openxmlformats.org/drawingml/2006/main" xmlns:r="http://schemas.openxmlformats.org/officeDocument/2006/relationships" xmlns:p="http://schemas.openxmlformats.org/presentationml/2006/main">
-  <p:cSld name="Slide 3">
+  <p:cSld>
     <p:bg>
       <p:bgPr>
         <a:solidFill>
@@ -1659,7 +1591,6 @@
             <a:avLst/>
           </a:prstGeom>
           <a:noFill/>
-          <a:ln/>
         </p:spPr>
         <p:txBody>
           <a:bodyPr wrap="square" lIns="0" tIns="0" rIns="0" bIns="0" rtlCol="0" anchor="ctr"/>
@@ -1673,9 +1604,9 @@
                 <a:solidFill>
                   <a:srgbClr val="1A2E1A"/>
                 </a:solidFill>
-                <a:latin typeface="Trebuchet MS" pitchFamily="34" charset="0"/>
-                <a:ea typeface="Trebuchet MS" pitchFamily="34" charset="-122"/>
-                <a:cs typeface="Trebuchet MS" pitchFamily="34" charset="-120"/>
+                <a:latin typeface="Trebuchet MS" panose="020B0603020202020204" pitchFamily="34" charset="0"/>
+                <a:ea typeface="Trebuchet MS" panose="020B0603020202020204" pitchFamily="34" charset="-122"/>
+                <a:cs typeface="Trebuchet MS" panose="020B0603020202020204" pitchFamily="34" charset="-120"/>
               </a:rPr>
               <a:t>1. Introduction</a:t>
             </a:r>
@@ -1721,7 +1652,6 @@
             <a:avLst/>
           </a:prstGeom>
           <a:noFill/>
-          <a:ln/>
         </p:spPr>
         <p:txBody>
           <a:bodyPr wrap="square" rtlCol="0" anchor="ctr"/>
@@ -1735,9 +1665,9 @@
                 <a:solidFill>
                   <a:srgbClr val="4A6741"/>
                 </a:solidFill>
-                <a:latin typeface="Calibri" pitchFamily="34" charset="0"/>
-                <a:ea typeface="Calibri" pitchFamily="34" charset="-122"/>
-                <a:cs typeface="Calibri" pitchFamily="34" charset="-120"/>
+                <a:latin typeface="Calibri" panose="020F0502020204030204" pitchFamily="34" charset="0"/>
+                <a:ea typeface="Calibri" panose="020F0502020204030204" pitchFamily="34" charset="-122"/>
+                <a:cs typeface="Calibri" panose="020F0502020204030204" pitchFamily="34" charset="-120"/>
               </a:rPr>
               <a:t>3 / 10</a:t>
             </a:r>
@@ -1749,7 +1679,11 @@
         <p:nvSpPr>
           <p:cNvPr id="6" name="Shape 4"/>
           <p:cNvSpPr/>
-          <p:nvPr/>
+          <p:nvPr>
+            <p:custDataLst>
+              <p:tags r:id="rId1"/>
+            </p:custDataLst>
+          </p:nvPr>
         </p:nvSpPr>
         <p:spPr>
           <a:xfrm>
@@ -1788,7 +1722,11 @@
         <p:nvSpPr>
           <p:cNvPr id="7" name="Shape 5"/>
           <p:cNvSpPr/>
-          <p:nvPr/>
+          <p:nvPr>
+            <p:custDataLst>
+              <p:tags r:id="rId2"/>
+            </p:custDataLst>
+          </p:nvPr>
         </p:nvSpPr>
         <p:spPr>
           <a:xfrm>
@@ -1813,7 +1751,11 @@
         <p:nvSpPr>
           <p:cNvPr id="8" name="Text 6"/>
           <p:cNvSpPr/>
-          <p:nvPr/>
+          <p:nvPr>
+            <p:custDataLst>
+              <p:tags r:id="rId3"/>
+            </p:custDataLst>
+          </p:nvPr>
         </p:nvSpPr>
         <p:spPr>
           <a:xfrm>
@@ -1824,7 +1766,6 @@
             <a:avLst/>
           </a:prstGeom>
           <a:noFill/>
-          <a:ln/>
         </p:spPr>
         <p:txBody>
           <a:bodyPr wrap="square" lIns="0" tIns="0" rIns="0" bIns="0" rtlCol="0" anchor="ctr"/>
@@ -1838,9 +1779,9 @@
                 <a:solidFill>
                   <a:srgbClr val="2C5F2D"/>
                 </a:solidFill>
-                <a:latin typeface="Trebuchet MS" pitchFamily="34" charset="0"/>
-                <a:ea typeface="Trebuchet MS" pitchFamily="34" charset="-122"/>
-                <a:cs typeface="Trebuchet MS" pitchFamily="34" charset="-120"/>
+                <a:latin typeface="Trebuchet MS" panose="020B0603020202020204" pitchFamily="34" charset="0"/>
+                <a:ea typeface="Trebuchet MS" panose="020B0603020202020204" pitchFamily="34" charset="-122"/>
+                <a:cs typeface="Trebuchet MS" panose="020B0603020202020204" pitchFamily="34" charset="-120"/>
               </a:rPr>
               <a:t>Problem</a:t>
             </a:r>
@@ -1852,7 +1793,11 @@
         <p:nvSpPr>
           <p:cNvPr id="9" name="Text 7"/>
           <p:cNvSpPr/>
-          <p:nvPr/>
+          <p:nvPr>
+            <p:custDataLst>
+              <p:tags r:id="rId4"/>
+            </p:custDataLst>
+          </p:nvPr>
         </p:nvSpPr>
         <p:spPr>
           <a:xfrm>
@@ -1863,7 +1808,6 @@
             <a:avLst/>
           </a:prstGeom>
           <a:noFill/>
-          <a:ln/>
         </p:spPr>
         <p:txBody>
           <a:bodyPr wrap="square" rtlCol="0" anchor="t"/>
@@ -1885,7 +1829,11 @@
         <p:nvSpPr>
           <p:cNvPr id="10" name="Shape 8"/>
           <p:cNvSpPr/>
-          <p:nvPr/>
+          <p:nvPr>
+            <p:custDataLst>
+              <p:tags r:id="rId5"/>
+            </p:custDataLst>
+          </p:nvPr>
         </p:nvSpPr>
         <p:spPr>
           <a:xfrm>
@@ -1917,7 +1865,11 @@
         <p:nvSpPr>
           <p:cNvPr id="11" name="Shape 9"/>
           <p:cNvSpPr/>
-          <p:nvPr/>
+          <p:nvPr>
+            <p:custDataLst>
+              <p:tags r:id="rId6"/>
+            </p:custDataLst>
+          </p:nvPr>
         </p:nvSpPr>
         <p:spPr>
           <a:xfrm>
@@ -1942,7 +1894,11 @@
         <p:nvSpPr>
           <p:cNvPr id="12" name="Text 10"/>
           <p:cNvSpPr/>
-          <p:nvPr/>
+          <p:nvPr>
+            <p:custDataLst>
+              <p:tags r:id="rId7"/>
+            </p:custDataLst>
+          </p:nvPr>
         </p:nvSpPr>
         <p:spPr>
           <a:xfrm>
@@ -1953,7 +1909,6 @@
             <a:avLst/>
           </a:prstGeom>
           <a:noFill/>
-          <a:ln/>
         </p:spPr>
         <p:txBody>
           <a:bodyPr wrap="square" lIns="0" tIns="0" rIns="0" bIns="0" rtlCol="0" anchor="ctr"/>
@@ -1967,9 +1922,9 @@
                 <a:solidFill>
                   <a:srgbClr val="2C5F2D"/>
                 </a:solidFill>
-                <a:latin typeface="Trebuchet MS" pitchFamily="34" charset="0"/>
-                <a:ea typeface="Trebuchet MS" pitchFamily="34" charset="-122"/>
-                <a:cs typeface="Trebuchet MS" pitchFamily="34" charset="-120"/>
+                <a:latin typeface="Trebuchet MS" panose="020B0603020202020204" pitchFamily="34" charset="0"/>
+                <a:ea typeface="Trebuchet MS" panose="020B0603020202020204" pitchFamily="34" charset="-122"/>
+                <a:cs typeface="Trebuchet MS" panose="020B0603020202020204" pitchFamily="34" charset="-120"/>
               </a:rPr>
               <a:t>Goal</a:t>
             </a:r>
@@ -1981,7 +1936,11 @@
         <p:nvSpPr>
           <p:cNvPr id="13" name="Text 11"/>
           <p:cNvSpPr/>
-          <p:nvPr/>
+          <p:nvPr>
+            <p:custDataLst>
+              <p:tags r:id="rId8"/>
+            </p:custDataLst>
+          </p:nvPr>
         </p:nvSpPr>
         <p:spPr>
           <a:xfrm>
@@ -1992,7 +1951,6 @@
             <a:avLst/>
           </a:prstGeom>
           <a:noFill/>
-          <a:ln/>
         </p:spPr>
         <p:txBody>
           <a:bodyPr wrap="square" rtlCol="0" anchor="t"/>
@@ -2006,9 +1964,9 @@
                 <a:solidFill>
                   <a:srgbClr val="1A2E1A"/>
                 </a:solidFill>
-                <a:latin typeface="Calibri" pitchFamily="34" charset="0"/>
-                <a:ea typeface="Calibri" pitchFamily="34" charset="-122"/>
-                <a:cs typeface="Calibri" pitchFamily="34" charset="-120"/>
+                <a:latin typeface="Calibri" panose="020F0502020204030204" pitchFamily="34" charset="0"/>
+                <a:ea typeface="Calibri" panose="020F0502020204030204" pitchFamily="34" charset="-122"/>
+                <a:cs typeface="Calibri" panose="020F0502020204030204" pitchFamily="34" charset="-120"/>
               </a:rPr>
               <a:t>Digitize coffee production data for the Ministry of Agriculture with a centralized, normalized relational database.</a:t>
             </a:r>
@@ -2020,7 +1978,11 @@
         <p:nvSpPr>
           <p:cNvPr id="14" name="Shape 12"/>
           <p:cNvSpPr/>
-          <p:nvPr/>
+          <p:nvPr>
+            <p:custDataLst>
+              <p:tags r:id="rId9"/>
+            </p:custDataLst>
+          </p:nvPr>
         </p:nvSpPr>
         <p:spPr>
           <a:xfrm>
@@ -2052,7 +2014,11 @@
         <p:nvSpPr>
           <p:cNvPr id="15" name="Shape 13"/>
           <p:cNvSpPr/>
-          <p:nvPr/>
+          <p:nvPr>
+            <p:custDataLst>
+              <p:tags r:id="rId10"/>
+            </p:custDataLst>
+          </p:nvPr>
         </p:nvSpPr>
         <p:spPr>
           <a:xfrm>
@@ -2077,7 +2043,11 @@
         <p:nvSpPr>
           <p:cNvPr id="16" name="Text 14"/>
           <p:cNvSpPr/>
-          <p:nvPr/>
+          <p:nvPr>
+            <p:custDataLst>
+              <p:tags r:id="rId11"/>
+            </p:custDataLst>
+          </p:nvPr>
         </p:nvSpPr>
         <p:spPr>
           <a:xfrm>
@@ -2088,7 +2058,6 @@
             <a:avLst/>
           </a:prstGeom>
           <a:noFill/>
-          <a:ln/>
         </p:spPr>
         <p:txBody>
           <a:bodyPr wrap="square" lIns="0" tIns="0" rIns="0" bIns="0" rtlCol="0" anchor="ctr"/>
@@ -2102,9 +2071,9 @@
                 <a:solidFill>
                   <a:srgbClr val="2C5F2D"/>
                 </a:solidFill>
-                <a:latin typeface="Trebuchet MS" pitchFamily="34" charset="0"/>
-                <a:ea typeface="Trebuchet MS" pitchFamily="34" charset="-122"/>
-                <a:cs typeface="Trebuchet MS" pitchFamily="34" charset="-120"/>
+                <a:latin typeface="Trebuchet MS" panose="020B0603020202020204" pitchFamily="34" charset="0"/>
+                <a:ea typeface="Trebuchet MS" panose="020B0603020202020204" pitchFamily="34" charset="-122"/>
+                <a:cs typeface="Trebuchet MS" panose="020B0603020202020204" pitchFamily="34" charset="-120"/>
               </a:rPr>
               <a:t>Solution</a:t>
             </a:r>
@@ -2116,7 +2085,11 @@
         <p:nvSpPr>
           <p:cNvPr id="17" name="Text 15"/>
           <p:cNvSpPr/>
-          <p:nvPr/>
+          <p:nvPr>
+            <p:custDataLst>
+              <p:tags r:id="rId12"/>
+            </p:custDataLst>
+          </p:nvPr>
         </p:nvSpPr>
         <p:spPr>
           <a:xfrm>
@@ -2127,7 +2100,6 @@
             <a:avLst/>
           </a:prstGeom>
           <a:noFill/>
-          <a:ln/>
         </p:spPr>
         <p:txBody>
           <a:bodyPr wrap="square" rtlCol="0" anchor="t"/>
@@ -2141,20 +2113,20 @@
                 <a:solidFill>
                   <a:srgbClr val="1A2E1A"/>
                 </a:solidFill>
-                <a:latin typeface="Calibri" pitchFamily="34" charset="0"/>
-                <a:ea typeface="Calibri" pitchFamily="34" charset="-122"/>
-                <a:cs typeface="Calibri" pitchFamily="34" charset="-120"/>
-              </a:rPr>
-              <a:t>A 3NF relational DB with a PERSON supertype, a dedicated LOCATION entity, and VISIT records </a:t>
+                <a:latin typeface="Calibri" panose="020F0502020204030204" pitchFamily="34" charset="0"/>
+                <a:ea typeface="Calibri" panose="020F0502020204030204" pitchFamily="34" charset="-122"/>
+                <a:cs typeface="Calibri" panose="020F0502020204030204" pitchFamily="34" charset="-120"/>
+              </a:rPr>
+              <a:t>A 3NF relational DB with a PERSON supertype, a dedicated LOCATION entity, and ADVICE sessions </a:t>
             </a:r>
             <a:r>
               <a:rPr lang="en-US" sz="1250" dirty="0" smtClean="0">
                 <a:solidFill>
                   <a:srgbClr val="1A2E1A"/>
                 </a:solidFill>
-                <a:latin typeface="Calibri" pitchFamily="34" charset="0"/>
-                <a:ea typeface="Calibri" pitchFamily="34" charset="-122"/>
-                <a:cs typeface="Calibri" pitchFamily="34" charset="-120"/>
+                <a:latin typeface="Calibri" panose="020F0502020204030204" pitchFamily="34" charset="0"/>
+                <a:ea typeface="Calibri" panose="020F0502020204030204" pitchFamily="34" charset="-122"/>
+                <a:cs typeface="Calibri" panose="020F0502020204030204" pitchFamily="34" charset="-120"/>
               </a:rPr>
               <a:t> </a:t>
             </a:r>
@@ -2163,9 +2135,9 @@
                 <a:solidFill>
                   <a:srgbClr val="1A2E1A"/>
                 </a:solidFill>
-                <a:latin typeface="Calibri" pitchFamily="34" charset="0"/>
-                <a:ea typeface="Calibri" pitchFamily="34" charset="-122"/>
-                <a:cs typeface="Calibri" pitchFamily="34" charset="-120"/>
+                <a:latin typeface="Calibri" panose="020F0502020204030204" pitchFamily="34" charset="0"/>
+                <a:ea typeface="Calibri" panose="020F0502020204030204" pitchFamily="34" charset="-122"/>
+                <a:cs typeface="Calibri" panose="020F0502020204030204" pitchFamily="34" charset="-120"/>
               </a:rPr>
               <a:t>ensuring integrity, security &amp; automation.</a:t>
             </a:r>
@@ -2183,7 +2155,7 @@
 
 <file path=ppt/slides/slide3.xml><?xml version="1.0" encoding="utf-8"?>
 <p:sld xmlns:a="http://schemas.openxmlformats.org/drawingml/2006/main" xmlns:r="http://schemas.openxmlformats.org/officeDocument/2006/relationships" xmlns:p="http://schemas.openxmlformats.org/presentationml/2006/main">
-  <p:cSld name="Slide 4">
+  <p:cSld>
     <p:bg>
       <p:bgPr>
         <a:solidFill>
@@ -2246,7 +2218,6 @@
             <a:avLst/>
           </a:prstGeom>
           <a:noFill/>
-          <a:ln/>
         </p:spPr>
         <p:txBody>
           <a:bodyPr wrap="square" lIns="0" tIns="0" rIns="0" bIns="0" rtlCol="0" anchor="ctr"/>
@@ -2260,9 +2231,9 @@
                 <a:solidFill>
                   <a:srgbClr val="1A2E1A"/>
                 </a:solidFill>
-                <a:latin typeface="Trebuchet MS" pitchFamily="34" charset="0"/>
-                <a:ea typeface="Trebuchet MS" pitchFamily="34" charset="-122"/>
-                <a:cs typeface="Trebuchet MS" pitchFamily="34" charset="-120"/>
+                <a:latin typeface="Trebuchet MS" panose="020B0603020202020204" pitchFamily="34" charset="0"/>
+                <a:ea typeface="Trebuchet MS" panose="020B0603020202020204" pitchFamily="34" charset="-122"/>
+                <a:cs typeface="Trebuchet MS" panose="020B0603020202020204" pitchFamily="34" charset="-120"/>
               </a:rPr>
               <a:t>2. EERD &amp; Core Entities</a:t>
             </a:r>
@@ -2308,7 +2279,6 @@
             <a:avLst/>
           </a:prstGeom>
           <a:noFill/>
-          <a:ln/>
         </p:spPr>
         <p:txBody>
           <a:bodyPr wrap="square" rtlCol="0" anchor="ctr"/>
@@ -2322,9 +2292,9 @@
                 <a:solidFill>
                   <a:srgbClr val="4A6741"/>
                 </a:solidFill>
-                <a:latin typeface="Calibri" pitchFamily="34" charset="0"/>
-                <a:ea typeface="Calibri" pitchFamily="34" charset="-122"/>
-                <a:cs typeface="Calibri" pitchFamily="34" charset="-120"/>
+                <a:latin typeface="Calibri" panose="020F0502020204030204" pitchFamily="34" charset="0"/>
+                <a:ea typeface="Calibri" panose="020F0502020204030204" pitchFamily="34" charset="-122"/>
+                <a:cs typeface="Calibri" panose="020F0502020204030204" pitchFamily="34" charset="-120"/>
               </a:rPr>
               <a:t>4 / 10</a:t>
             </a:r>
@@ -2338,13 +2308,7 @@
           <p:cNvGraphicFramePr>
             <a:graphicFrameLocks noGrp="1"/>
           </p:cNvGraphicFramePr>
-          <p:nvPr>
-            <p:extLst>
-              <p:ext uri="{D42A27DB-BD31-4B8C-83A1-F6EECF244321}">
-                <p14:modId xmlns:p14="http://schemas.microsoft.com/office/powerpoint/2010/main" val="4207357031"/>
-              </p:ext>
-            </p:extLst>
-          </p:nvPr>
+          <p:nvPr/>
         </p:nvGraphicFramePr>
         <p:xfrm>
           <a:off x="365760" y="1234440"/>
@@ -2355,27 +2319,9 @@
             <a:tbl>
               <a:tblPr/>
               <a:tblGrid>
-                <a:gridCol w="1828800">
-                  <a:extLst>
-                    <a:ext uri="{9D8B030D-6E8A-4147-A177-3AD203B41FA5}">
-                      <a16:colId xmlns:a16="http://schemas.microsoft.com/office/drawing/2014/main" val="20000"/>
-                    </a:ext>
-                  </a:extLst>
-                </a:gridCol>
-                <a:gridCol w="2743200">
-                  <a:extLst>
-                    <a:ext uri="{9D8B030D-6E8A-4147-A177-3AD203B41FA5}">
-                      <a16:colId xmlns:a16="http://schemas.microsoft.com/office/drawing/2014/main" val="20001"/>
-                    </a:ext>
-                  </a:extLst>
-                </a:gridCol>
-                <a:gridCol w="3840480">
-                  <a:extLst>
-                    <a:ext uri="{9D8B030D-6E8A-4147-A177-3AD203B41FA5}">
-                      <a16:colId xmlns:a16="http://schemas.microsoft.com/office/drawing/2014/main" val="20002"/>
-                    </a:ext>
-                  </a:extLst>
-                </a:gridCol>
+                <a:gridCol w="1828800"/>
+                <a:gridCol w="2743200"/>
+                <a:gridCol w="3840480"/>
               </a:tblGrid>
               <a:tr h="301752">
                 <a:tc>
@@ -2561,11 +2507,6 @@
                     </a:solidFill>
                   </a:tcPr>
                 </a:tc>
-                <a:extLst>
-                  <a:ext uri="{0D108BD9-81ED-4DB2-BD59-A6C34878D82A}">
-                    <a16:rowId xmlns:a16="http://schemas.microsoft.com/office/drawing/2014/main" val="10000"/>
-                  </a:ext>
-                </a:extLst>
               </a:tr>
               <a:tr h="301752">
                 <a:tc>
@@ -2759,11 +2700,6 @@
                     </a:solidFill>
                   </a:tcPr>
                 </a:tc>
-                <a:extLst>
-                  <a:ext uri="{0D108BD9-81ED-4DB2-BD59-A6C34878D82A}">
-                    <a16:rowId xmlns:a16="http://schemas.microsoft.com/office/drawing/2014/main" val="10001"/>
-                  </a:ext>
-                </a:extLst>
               </a:tr>
               <a:tr h="301752">
                 <a:tc>
@@ -2957,11 +2893,6 @@
                     </a:solidFill>
                   </a:tcPr>
                 </a:tc>
-                <a:extLst>
-                  <a:ext uri="{0D108BD9-81ED-4DB2-BD59-A6C34878D82A}">
-                    <a16:rowId xmlns:a16="http://schemas.microsoft.com/office/drawing/2014/main" val="10002"/>
-                  </a:ext>
-                </a:extLst>
               </a:tr>
               <a:tr h="301752">
                 <a:tc>
@@ -3155,11 +3086,6 @@
                     </a:solidFill>
                   </a:tcPr>
                 </a:tc>
-                <a:extLst>
-                  <a:ext uri="{0D108BD9-81ED-4DB2-BD59-A6C34878D82A}">
-                    <a16:rowId xmlns:a16="http://schemas.microsoft.com/office/drawing/2014/main" val="10003"/>
-                  </a:ext>
-                </a:extLst>
               </a:tr>
               <a:tr h="301752">
                 <a:tc>
@@ -3369,11 +3295,6 @@
                     </a:solidFill>
                   </a:tcPr>
                 </a:tc>
-                <a:extLst>
-                  <a:ext uri="{0D108BD9-81ED-4DB2-BD59-A6C34878D82A}">
-                    <a16:rowId xmlns:a16="http://schemas.microsoft.com/office/drawing/2014/main" val="10004"/>
-                  </a:ext>
-                </a:extLst>
               </a:tr>
               <a:tr h="301752">
                 <a:tc>
@@ -3567,11 +3488,6 @@
                     </a:solidFill>
                   </a:tcPr>
                 </a:tc>
-                <a:extLst>
-                  <a:ext uri="{0D108BD9-81ED-4DB2-BD59-A6C34878D82A}">
-                    <a16:rowId xmlns:a16="http://schemas.microsoft.com/office/drawing/2014/main" val="10005"/>
-                  </a:ext>
-                </a:extLst>
               </a:tr>
               <a:tr h="301752">
                 <a:tc>
@@ -3765,11 +3681,6 @@
                     </a:solidFill>
                   </a:tcPr>
                 </a:tc>
-                <a:extLst>
-                  <a:ext uri="{0D108BD9-81ED-4DB2-BD59-A6C34878D82A}">
-                    <a16:rowId xmlns:a16="http://schemas.microsoft.com/office/drawing/2014/main" val="10006"/>
-                  </a:ext>
-                </a:extLst>
               </a:tr>
               <a:tr h="301752">
                 <a:tc>
@@ -3963,11 +3874,6 @@
                     </a:solidFill>
                   </a:tcPr>
                 </a:tc>
-                <a:extLst>
-                  <a:ext uri="{0D108BD9-81ED-4DB2-BD59-A6C34878D82A}">
-                    <a16:rowId xmlns:a16="http://schemas.microsoft.com/office/drawing/2014/main" val="10007"/>
-                  </a:ext>
-                </a:extLst>
               </a:tr>
               <a:tr h="301752">
                 <a:tc>
@@ -4177,11 +4083,6 @@
                     </a:solidFill>
                   </a:tcPr>
                 </a:tc>
-                <a:extLst>
-                  <a:ext uri="{0D108BD9-81ED-4DB2-BD59-A6C34878D82A}">
-                    <a16:rowId xmlns:a16="http://schemas.microsoft.com/office/drawing/2014/main" val="10008"/>
-                  </a:ext>
-                </a:extLst>
               </a:tr>
               <a:tr h="301752">
                 <a:tc>
@@ -4375,11 +4276,6 @@
                     </a:solidFill>
                   </a:tcPr>
                 </a:tc>
-                <a:extLst>
-                  <a:ext uri="{0D108BD9-81ED-4DB2-BD59-A6C34878D82A}">
-                    <a16:rowId xmlns:a16="http://schemas.microsoft.com/office/drawing/2014/main" val="10009"/>
-                  </a:ext>
-                </a:extLst>
               </a:tr>
               <a:tr h="301752">
                 <a:tc>
@@ -4573,11 +4469,6 @@
                     </a:solidFill>
                   </a:tcPr>
                 </a:tc>
-                <a:extLst>
-                  <a:ext uri="{0D108BD9-81ED-4DB2-BD59-A6C34878D82A}">
-                    <a16:rowId xmlns:a16="http://schemas.microsoft.com/office/drawing/2014/main" val="10010"/>
-                  </a:ext>
-                </a:extLst>
               </a:tr>
             </a:tbl>
           </a:graphicData>
@@ -4593,7 +4484,7 @@
 
 <file path=ppt/slides/slide4.xml><?xml version="1.0" encoding="utf-8"?>
 <p:sld xmlns:a="http://schemas.openxmlformats.org/drawingml/2006/main" xmlns:r="http://schemas.openxmlformats.org/officeDocument/2006/relationships" xmlns:p="http://schemas.openxmlformats.org/presentationml/2006/main">
-  <p:cSld name="Slide 5">
+  <p:cSld>
     <p:bg>
       <p:bgPr>
         <a:solidFill>
@@ -4656,7 +4547,6 @@
             <a:avLst/>
           </a:prstGeom>
           <a:noFill/>
-          <a:ln/>
         </p:spPr>
         <p:txBody>
           <a:bodyPr wrap="square" lIns="0" tIns="0" rIns="0" bIns="0" rtlCol="0" anchor="ctr"/>
@@ -4670,9 +4560,9 @@
                 <a:solidFill>
                   <a:srgbClr val="1A2E1A"/>
                 </a:solidFill>
-                <a:latin typeface="Trebuchet MS" pitchFamily="34" charset="0"/>
-                <a:ea typeface="Trebuchet MS" pitchFamily="34" charset="-122"/>
-                <a:cs typeface="Trebuchet MS" pitchFamily="34" charset="-120"/>
+                <a:latin typeface="Trebuchet MS" panose="020B0603020202020204" pitchFamily="34" charset="0"/>
+                <a:ea typeface="Trebuchet MS" panose="020B0603020202020204" pitchFamily="34" charset="-122"/>
+                <a:cs typeface="Trebuchet MS" panose="020B0603020202020204" pitchFamily="34" charset="-120"/>
               </a:rPr>
               <a:t>3. Database Design Features</a:t>
             </a:r>
@@ -4718,7 +4608,6 @@
             <a:avLst/>
           </a:prstGeom>
           <a:noFill/>
-          <a:ln/>
         </p:spPr>
         <p:txBody>
           <a:bodyPr wrap="square" rtlCol="0" anchor="ctr"/>
@@ -4732,9 +4621,9 @@
                 <a:solidFill>
                   <a:srgbClr val="4A6741"/>
                 </a:solidFill>
-                <a:latin typeface="Calibri" pitchFamily="34" charset="0"/>
-                <a:ea typeface="Calibri" pitchFamily="34" charset="-122"/>
-                <a:cs typeface="Calibri" pitchFamily="34" charset="-120"/>
+                <a:latin typeface="Calibri" panose="020F0502020204030204" pitchFamily="34" charset="0"/>
+                <a:ea typeface="Calibri" panose="020F0502020204030204" pitchFamily="34" charset="-122"/>
+                <a:cs typeface="Calibri" panose="020F0502020204030204" pitchFamily="34" charset="-120"/>
               </a:rPr>
               <a:t>5 / 10</a:t>
             </a:r>
@@ -4814,7 +4703,6 @@
             <a:avLst/>
           </a:prstGeom>
           <a:noFill/>
-          <a:ln/>
         </p:spPr>
         <p:txBody>
           <a:bodyPr wrap="square" lIns="0" tIns="0" rIns="0" bIns="0" rtlCol="0" anchor="ctr"/>
@@ -4828,9 +4716,9 @@
                 <a:solidFill>
                   <a:srgbClr val="FFFFFF"/>
                 </a:solidFill>
-                <a:latin typeface="Trebuchet MS" pitchFamily="34" charset="0"/>
-                <a:ea typeface="Trebuchet MS" pitchFamily="34" charset="-122"/>
-                <a:cs typeface="Trebuchet MS" pitchFamily="34" charset="-120"/>
+                <a:latin typeface="Trebuchet MS" panose="020B0603020202020204" pitchFamily="34" charset="0"/>
+                <a:ea typeface="Trebuchet MS" panose="020B0603020202020204" pitchFamily="34" charset="-122"/>
+                <a:cs typeface="Trebuchet MS" panose="020B0603020202020204" pitchFamily="34" charset="-120"/>
               </a:rPr>
               <a:t>Normalization (3NF)</a:t>
             </a:r>
@@ -4853,7 +4741,6 @@
             <a:avLst/>
           </a:prstGeom>
           <a:noFill/>
-          <a:ln/>
         </p:spPr>
         <p:txBody>
           <a:bodyPr wrap="square" rtlCol="0" anchor="t"/>
@@ -4871,9 +4758,9 @@
                 <a:solidFill>
                   <a:srgbClr val="1A2E1A"/>
                 </a:solidFill>
-                <a:latin typeface="Calibri" pitchFamily="34" charset="0"/>
-                <a:ea typeface="Calibri" pitchFamily="34" charset="-122"/>
-                <a:cs typeface="Calibri" pitchFamily="34" charset="-120"/>
+                <a:latin typeface="Calibri" panose="020F0502020204030204" pitchFamily="34" charset="0"/>
+                <a:ea typeface="Calibri" panose="020F0502020204030204" pitchFamily="34" charset="-122"/>
+                <a:cs typeface="Calibri" panose="020F0502020204030204" pitchFamily="34" charset="-120"/>
               </a:rPr>
               <a:t>Tables normalized to 3rd Normal </a:t>
             </a:r>
@@ -4882,9 +4769,9 @@
                 <a:solidFill>
                   <a:srgbClr val="1A2E1A"/>
                 </a:solidFill>
-                <a:latin typeface="Calibri" pitchFamily="34" charset="0"/>
-                <a:ea typeface="Calibri" pitchFamily="34" charset="-122"/>
-                <a:cs typeface="Calibri" pitchFamily="34" charset="-120"/>
+                <a:latin typeface="Calibri" panose="020F0502020204030204" pitchFamily="34" charset="0"/>
+                <a:ea typeface="Calibri" panose="020F0502020204030204" pitchFamily="34" charset="-122"/>
+                <a:cs typeface="Calibri" panose="020F0502020204030204" pitchFamily="34" charset="-120"/>
               </a:rPr>
               <a:t>Form.</a:t>
             </a:r>
@@ -4903,9 +4790,9 @@
                 <a:solidFill>
                   <a:srgbClr val="1A2E1A"/>
                 </a:solidFill>
-                <a:latin typeface="Calibri" pitchFamily="34" charset="0"/>
-                <a:ea typeface="Calibri" pitchFamily="34" charset="-122"/>
-                <a:cs typeface="Calibri" pitchFamily="34" charset="-120"/>
+                <a:latin typeface="Calibri" panose="020F0502020204030204" pitchFamily="34" charset="0"/>
+                <a:ea typeface="Calibri" panose="020F0502020204030204" pitchFamily="34" charset="-122"/>
+                <a:cs typeface="Calibri" panose="020F0502020204030204" pitchFamily="34" charset="-120"/>
               </a:rPr>
               <a:t>Eliminates data </a:t>
             </a:r>
@@ -4914,9 +4801,9 @@
                 <a:solidFill>
                   <a:srgbClr val="1A2E1A"/>
                 </a:solidFill>
-                <a:latin typeface="Calibri" pitchFamily="34" charset="0"/>
-                <a:ea typeface="Calibri" pitchFamily="34" charset="-122"/>
-                <a:cs typeface="Calibri" pitchFamily="34" charset="-120"/>
+                <a:latin typeface="Calibri" panose="020F0502020204030204" pitchFamily="34" charset="0"/>
+                <a:ea typeface="Calibri" panose="020F0502020204030204" pitchFamily="34" charset="-122"/>
+                <a:cs typeface="Calibri" panose="020F0502020204030204" pitchFamily="34" charset="-120"/>
               </a:rPr>
               <a:t>redundancy.</a:t>
             </a:r>
@@ -4935,9 +4822,9 @@
                 <a:solidFill>
                   <a:srgbClr val="1A2E1A"/>
                 </a:solidFill>
-                <a:latin typeface="Calibri" pitchFamily="34" charset="0"/>
-                <a:ea typeface="Calibri" pitchFamily="34" charset="-122"/>
-                <a:cs typeface="Calibri" pitchFamily="34" charset="-120"/>
+                <a:latin typeface="Calibri" panose="020F0502020204030204" pitchFamily="34" charset="0"/>
+                <a:ea typeface="Calibri" panose="020F0502020204030204" pitchFamily="34" charset="-122"/>
+                <a:cs typeface="Calibri" panose="020F0502020204030204" pitchFamily="34" charset="-120"/>
               </a:rPr>
               <a:t>LOCATION is a separate entity (district, region) — referenced by FARMER &amp; FARM via </a:t>
             </a:r>
@@ -4946,9 +4833,9 @@
                 <a:solidFill>
                   <a:srgbClr val="1A2E1A"/>
                 </a:solidFill>
-                <a:latin typeface="Calibri" pitchFamily="34" charset="0"/>
-                <a:ea typeface="Calibri" pitchFamily="34" charset="-122"/>
-                <a:cs typeface="Calibri" pitchFamily="34" charset="-120"/>
+                <a:latin typeface="Calibri" panose="020F0502020204030204" pitchFamily="34" charset="0"/>
+                <a:ea typeface="Calibri" panose="020F0502020204030204" pitchFamily="34" charset="-122"/>
+                <a:cs typeface="Calibri" panose="020F0502020204030204" pitchFamily="34" charset="-120"/>
               </a:rPr>
               <a:t>FK.</a:t>
             </a:r>
@@ -4967,9 +4854,9 @@
                 <a:solidFill>
                   <a:srgbClr val="1A2E1A"/>
                 </a:solidFill>
-                <a:latin typeface="Calibri" pitchFamily="34" charset="0"/>
-                <a:ea typeface="Calibri" pitchFamily="34" charset="-122"/>
-                <a:cs typeface="Calibri" pitchFamily="34" charset="-120"/>
+                <a:latin typeface="Calibri" panose="020F0502020204030204" pitchFamily="34" charset="0"/>
+                <a:ea typeface="Calibri" panose="020F0502020204030204" pitchFamily="34" charset="-122"/>
+                <a:cs typeface="Calibri" panose="020F0502020204030204" pitchFamily="34" charset="-120"/>
               </a:rPr>
               <a:t>VISIT replaces </a:t>
             </a:r>
@@ -4982,9 +4869,9 @@
                 <a:solidFill>
                   <a:srgbClr val="1A2E1A"/>
                 </a:solidFill>
-                <a:latin typeface="Calibri" pitchFamily="34" charset="0"/>
-                <a:ea typeface="Calibri" pitchFamily="34" charset="-122"/>
-                <a:cs typeface="Calibri" pitchFamily="34" charset="-120"/>
+                <a:latin typeface="Calibri" panose="020F0502020204030204" pitchFamily="34" charset="0"/>
+                <a:ea typeface="Calibri" panose="020F0502020204030204" pitchFamily="34" charset="-122"/>
+                <a:cs typeface="Calibri" panose="020F0502020204030204" pitchFamily="34" charset="-120"/>
               </a:rPr>
               <a:t> </a:t>
             </a:r>
@@ -4993,9 +4880,9 @@
                 <a:solidFill>
                   <a:srgbClr val="1A2E1A"/>
                 </a:solidFill>
-                <a:latin typeface="Calibri" pitchFamily="34" charset="0"/>
-                <a:ea typeface="Calibri" pitchFamily="34" charset="-122"/>
-                <a:cs typeface="Calibri" pitchFamily="34" charset="-120"/>
+                <a:latin typeface="Calibri" panose="020F0502020204030204" pitchFamily="34" charset="0"/>
+                <a:ea typeface="Calibri" panose="020F0502020204030204" pitchFamily="34" charset="-122"/>
+                <a:cs typeface="Calibri" panose="020F0502020204030204" pitchFamily="34" charset="-120"/>
               </a:rPr>
               <a:t>session logs for field </a:t>
             </a:r>
@@ -5004,9 +4891,9 @@
                 <a:solidFill>
                   <a:srgbClr val="1A2E1A"/>
                 </a:solidFill>
-                <a:latin typeface="Calibri" pitchFamily="34" charset="0"/>
-                <a:ea typeface="Calibri" pitchFamily="34" charset="-122"/>
-                <a:cs typeface="Calibri" pitchFamily="34" charset="-120"/>
+                <a:latin typeface="Calibri" panose="020F0502020204030204" pitchFamily="34" charset="0"/>
+                <a:ea typeface="Calibri" panose="020F0502020204030204" pitchFamily="34" charset="-122"/>
+                <a:cs typeface="Calibri" panose="020F0502020204030204" pitchFamily="34" charset="-120"/>
               </a:rPr>
               <a:t>visits.</a:t>
             </a:r>
@@ -5086,7 +4973,6 @@
             <a:avLst/>
           </a:prstGeom>
           <a:noFill/>
-          <a:ln/>
         </p:spPr>
         <p:txBody>
           <a:bodyPr wrap="square" lIns="0" tIns="0" rIns="0" bIns="0" rtlCol="0" anchor="ctr"/>
@@ -5100,9 +4986,9 @@
                 <a:solidFill>
                   <a:srgbClr val="FFFFFF"/>
                 </a:solidFill>
-                <a:latin typeface="Trebuchet MS" pitchFamily="34" charset="0"/>
-                <a:ea typeface="Trebuchet MS" pitchFamily="34" charset="-122"/>
-                <a:cs typeface="Trebuchet MS" pitchFamily="34" charset="-120"/>
+                <a:latin typeface="Trebuchet MS" panose="020B0603020202020204" pitchFamily="34" charset="0"/>
+                <a:ea typeface="Trebuchet MS" panose="020B0603020202020204" pitchFamily="34" charset="-122"/>
+                <a:cs typeface="Trebuchet MS" panose="020B0603020202020204" pitchFamily="34" charset="-120"/>
               </a:rPr>
               <a:t>Integrity Constraints</a:t>
             </a:r>
@@ -5125,7 +5011,6 @@
             <a:avLst/>
           </a:prstGeom>
           <a:noFill/>
-          <a:ln/>
         </p:spPr>
         <p:txBody>
           <a:bodyPr wrap="square" rtlCol="0" anchor="t"/>
@@ -5143,9 +5028,9 @@
                 <a:solidFill>
                   <a:srgbClr val="1A2E1A"/>
                 </a:solidFill>
-                <a:latin typeface="Calibri" pitchFamily="34" charset="0"/>
-                <a:ea typeface="Calibri" pitchFamily="34" charset="-122"/>
-                <a:cs typeface="Calibri" pitchFamily="34" charset="-120"/>
+                <a:latin typeface="Calibri" panose="020F0502020204030204" pitchFamily="34" charset="0"/>
+                <a:ea typeface="Calibri" panose="020F0502020204030204" pitchFamily="34" charset="-122"/>
+                <a:cs typeface="Calibri" panose="020F0502020204030204" pitchFamily="34" charset="-120"/>
               </a:rPr>
               <a:t>Primary Keys on every </a:t>
             </a:r>
@@ -5154,9 +5039,9 @@
                 <a:solidFill>
                   <a:srgbClr val="1A2E1A"/>
                 </a:solidFill>
-                <a:latin typeface="Calibri" pitchFamily="34" charset="0"/>
-                <a:ea typeface="Calibri" pitchFamily="34" charset="-122"/>
-                <a:cs typeface="Calibri" pitchFamily="34" charset="-120"/>
+                <a:latin typeface="Calibri" panose="020F0502020204030204" pitchFamily="34" charset="0"/>
+                <a:ea typeface="Calibri" panose="020F0502020204030204" pitchFamily="34" charset="-122"/>
+                <a:cs typeface="Calibri" panose="020F0502020204030204" pitchFamily="34" charset="-120"/>
               </a:rPr>
               <a:t>table.</a:t>
             </a:r>
@@ -5175,9 +5060,9 @@
                 <a:solidFill>
                   <a:srgbClr val="1A2E1A"/>
                 </a:solidFill>
-                <a:latin typeface="Calibri" pitchFamily="34" charset="0"/>
-                <a:ea typeface="Calibri" pitchFamily="34" charset="-122"/>
-                <a:cs typeface="Calibri" pitchFamily="34" charset="-120"/>
+                <a:latin typeface="Calibri" panose="020F0502020204030204" pitchFamily="34" charset="0"/>
+                <a:ea typeface="Calibri" panose="020F0502020204030204" pitchFamily="34" charset="-122"/>
+                <a:cs typeface="Calibri" panose="020F0502020204030204" pitchFamily="34" charset="-120"/>
               </a:rPr>
               <a:t>Foreign Keys with CASCADE / SET NULL </a:t>
             </a:r>
@@ -5186,9 +5071,9 @@
                 <a:solidFill>
                   <a:srgbClr val="1A2E1A"/>
                 </a:solidFill>
-                <a:latin typeface="Calibri" pitchFamily="34" charset="0"/>
-                <a:ea typeface="Calibri" pitchFamily="34" charset="-122"/>
-                <a:cs typeface="Calibri" pitchFamily="34" charset="-120"/>
+                <a:latin typeface="Calibri" panose="020F0502020204030204" pitchFamily="34" charset="0"/>
+                <a:ea typeface="Calibri" panose="020F0502020204030204" pitchFamily="34" charset="-122"/>
+                <a:cs typeface="Calibri" panose="020F0502020204030204" pitchFamily="34" charset="-120"/>
               </a:rPr>
               <a:t>rules.</a:t>
             </a:r>
@@ -5207,9 +5092,9 @@
                 <a:solidFill>
                   <a:srgbClr val="1A2E1A"/>
                 </a:solidFill>
-                <a:latin typeface="Calibri" pitchFamily="34" charset="0"/>
-                <a:ea typeface="Calibri" pitchFamily="34" charset="-122"/>
-                <a:cs typeface="Calibri" pitchFamily="34" charset="-120"/>
+                <a:latin typeface="Calibri" panose="020F0502020204030204" pitchFamily="34" charset="0"/>
+                <a:ea typeface="Calibri" panose="020F0502020204030204" pitchFamily="34" charset="-122"/>
+                <a:cs typeface="Calibri" panose="020F0502020204030204" pitchFamily="34" charset="-120"/>
               </a:rPr>
               <a:t>CHECK constraints: size_hectares &gt; 0, stock_quantity ≥ 0</a:t>
             </a:r>
@@ -5228,9 +5113,9 @@
                 <a:solidFill>
                   <a:srgbClr val="1A2E1A"/>
                 </a:solidFill>
-                <a:latin typeface="Calibri" pitchFamily="34" charset="0"/>
-                <a:ea typeface="Calibri" pitchFamily="34" charset="-122"/>
-                <a:cs typeface="Calibri" pitchFamily="34" charset="-120"/>
+                <a:latin typeface="Calibri" panose="020F0502020204030204" pitchFamily="34" charset="0"/>
+                <a:ea typeface="Calibri" panose="020F0502020204030204" pitchFamily="34" charset="-122"/>
+                <a:cs typeface="Calibri" panose="020F0502020204030204" pitchFamily="34" charset="-120"/>
               </a:rPr>
               <a:t>UNIQUE constraint on contact </a:t>
             </a:r>
@@ -5239,9 +5124,9 @@
                 <a:solidFill>
                   <a:srgbClr val="1A2E1A"/>
                 </a:solidFill>
-                <a:latin typeface="Calibri" pitchFamily="34" charset="0"/>
-                <a:ea typeface="Calibri" pitchFamily="34" charset="-122"/>
-                <a:cs typeface="Calibri" pitchFamily="34" charset="-120"/>
+                <a:latin typeface="Calibri" panose="020F0502020204030204" pitchFamily="34" charset="0"/>
+                <a:ea typeface="Calibri" panose="020F0502020204030204" pitchFamily="34" charset="-122"/>
+                <a:cs typeface="Calibri" panose="020F0502020204030204" pitchFamily="34" charset="-120"/>
               </a:rPr>
               <a:t>number.</a:t>
             </a:r>
@@ -5260,9 +5145,9 @@
                 <a:solidFill>
                   <a:srgbClr val="1A2E1A"/>
                 </a:solidFill>
-                <a:latin typeface="Calibri" pitchFamily="34" charset="0"/>
-                <a:ea typeface="Calibri" pitchFamily="34" charset="-122"/>
-                <a:cs typeface="Calibri" pitchFamily="34" charset="-120"/>
+                <a:latin typeface="Calibri" panose="020F0502020204030204" pitchFamily="34" charset="0"/>
+                <a:ea typeface="Calibri" panose="020F0502020204030204" pitchFamily="34" charset="-122"/>
+                <a:cs typeface="Calibri" panose="020F0502020204030204" pitchFamily="34" charset="-120"/>
               </a:rPr>
               <a:t>NOT NULL on critical fields</a:t>
             </a:r>
@@ -5342,7 +5227,6 @@
             <a:avLst/>
           </a:prstGeom>
           <a:noFill/>
-          <a:ln/>
         </p:spPr>
         <p:txBody>
           <a:bodyPr wrap="square" lIns="0" tIns="0" rIns="0" bIns="0" rtlCol="0" anchor="ctr"/>
@@ -5356,9 +5240,9 @@
                 <a:solidFill>
                   <a:srgbClr val="FFFFFF"/>
                 </a:solidFill>
-                <a:latin typeface="Trebuchet MS" pitchFamily="34" charset="0"/>
-                <a:ea typeface="Trebuchet MS" pitchFamily="34" charset="-122"/>
-                <a:cs typeface="Trebuchet MS" pitchFamily="34" charset="-120"/>
+                <a:latin typeface="Trebuchet MS" panose="020B0603020202020204" pitchFamily="34" charset="0"/>
+                <a:ea typeface="Trebuchet MS" panose="020B0603020202020204" pitchFamily="34" charset="-122"/>
+                <a:cs typeface="Trebuchet MS" panose="020B0603020202020204" pitchFamily="34" charset="-120"/>
               </a:rPr>
               <a:t>Inheritance (Specialization)</a:t>
             </a:r>
@@ -5381,7 +5265,6 @@
             <a:avLst/>
           </a:prstGeom>
           <a:noFill/>
-          <a:ln/>
         </p:spPr>
         <p:txBody>
           <a:bodyPr wrap="square" rtlCol="0" anchor="t"/>
@@ -5399,9 +5282,9 @@
                 <a:solidFill>
                   <a:srgbClr val="1A2E1A"/>
                 </a:solidFill>
-                <a:latin typeface="Calibri" pitchFamily="34" charset="0"/>
-                <a:ea typeface="Calibri" pitchFamily="34" charset="-122"/>
-                <a:cs typeface="Calibri" pitchFamily="34" charset="-120"/>
+                <a:latin typeface="Calibri" panose="020F0502020204030204" pitchFamily="34" charset="0"/>
+                <a:ea typeface="Calibri" panose="020F0502020204030204" pitchFamily="34" charset="-122"/>
+                <a:cs typeface="Calibri" panose="020F0502020204030204" pitchFamily="34" charset="-120"/>
               </a:rPr>
               <a:t>PERSON is the supertype (person_id, f_name, l_name, contact, gender)</a:t>
             </a:r>
@@ -5420,9 +5303,9 @@
                 <a:solidFill>
                   <a:srgbClr val="1A2E1A"/>
                 </a:solidFill>
-                <a:latin typeface="Calibri" pitchFamily="34" charset="0"/>
-                <a:ea typeface="Calibri" pitchFamily="34" charset="-122"/>
-                <a:cs typeface="Calibri" pitchFamily="34" charset="-120"/>
+                <a:latin typeface="Calibri" panose="020F0502020204030204" pitchFamily="34" charset="0"/>
+                <a:ea typeface="Calibri" panose="020F0502020204030204" pitchFamily="34" charset="-122"/>
+                <a:cs typeface="Calibri" panose="020F0502020204030204" pitchFamily="34" charset="-120"/>
               </a:rPr>
               <a:t>Subtypes: FARMER, EXTENSION WORKER, MINISTRY OFFICIAL</a:t>
             </a:r>
@@ -5441,9 +5324,9 @@
                 <a:solidFill>
                   <a:srgbClr val="1A2E1A"/>
                 </a:solidFill>
-                <a:latin typeface="Calibri" pitchFamily="34" charset="0"/>
-                <a:ea typeface="Calibri" pitchFamily="34" charset="-122"/>
-                <a:cs typeface="Calibri" pitchFamily="34" charset="-120"/>
+                <a:latin typeface="Calibri" panose="020F0502020204030204" pitchFamily="34" charset="0"/>
+                <a:ea typeface="Calibri" panose="020F0502020204030204" pitchFamily="34" charset="-122"/>
+                <a:cs typeface="Calibri" panose="020F0502020204030204" pitchFamily="34" charset="-120"/>
               </a:rPr>
               <a:t>Subtype PKs reference PERSON via FK — avoids duplication</a:t>
             </a:r>
@@ -5461,7 +5344,7 @@
 
 <file path=ppt/slides/slide5.xml><?xml version="1.0" encoding="utf-8"?>
 <p:sld xmlns:a="http://schemas.openxmlformats.org/drawingml/2006/main" xmlns:r="http://schemas.openxmlformats.org/officeDocument/2006/relationships" xmlns:p="http://schemas.openxmlformats.org/presentationml/2006/main">
-  <p:cSld name="Slide 6">
+  <p:cSld>
     <p:bg>
       <p:bgPr>
         <a:solidFill>
@@ -5524,7 +5407,6 @@
             <a:avLst/>
           </a:prstGeom>
           <a:noFill/>
-          <a:ln/>
         </p:spPr>
         <p:txBody>
           <a:bodyPr wrap="square" lIns="0" tIns="0" rIns="0" bIns="0" rtlCol="0" anchor="ctr"/>
@@ -5538,9 +5420,9 @@
                 <a:solidFill>
                   <a:srgbClr val="FFFFFF"/>
                 </a:solidFill>
-                <a:latin typeface="Trebuchet MS" pitchFamily="34" charset="0"/>
-                <a:ea typeface="Trebuchet MS" pitchFamily="34" charset="-122"/>
-                <a:cs typeface="Trebuchet MS" pitchFamily="34" charset="-120"/>
+                <a:latin typeface="Trebuchet MS" panose="020B0603020202020204" pitchFamily="34" charset="0"/>
+                <a:ea typeface="Trebuchet MS" panose="020B0603020202020204" pitchFamily="34" charset="-122"/>
+                <a:cs typeface="Trebuchet MS" panose="020B0603020202020204" pitchFamily="34" charset="-120"/>
               </a:rPr>
               <a:t>4. Security &amp; Role-Based Access Control</a:t>
             </a:r>
@@ -5586,7 +5468,6 @@
             <a:avLst/>
           </a:prstGeom>
           <a:noFill/>
-          <a:ln/>
         </p:spPr>
         <p:txBody>
           <a:bodyPr wrap="square" rtlCol="0" anchor="ctr"/>
@@ -5600,9 +5481,9 @@
                 <a:solidFill>
                   <a:srgbClr val="8FAF72"/>
                 </a:solidFill>
-                <a:latin typeface="Calibri" pitchFamily="34" charset="0"/>
-                <a:ea typeface="Calibri" pitchFamily="34" charset="-122"/>
-                <a:cs typeface="Calibri" pitchFamily="34" charset="-120"/>
+                <a:latin typeface="Calibri" panose="020F0502020204030204" pitchFamily="34" charset="0"/>
+                <a:ea typeface="Calibri" panose="020F0502020204030204" pitchFamily="34" charset="-122"/>
+                <a:cs typeface="Calibri" panose="020F0502020204030204" pitchFamily="34" charset="-120"/>
               </a:rPr>
               <a:t>6 / 10</a:t>
             </a:r>
@@ -5675,7 +5556,6 @@
             <a:avLst/>
           </a:prstGeom>
           <a:noFill/>
-          <a:ln/>
         </p:spPr>
         <p:txBody>
           <a:bodyPr wrap="square" lIns="0" tIns="0" rIns="0" bIns="0" rtlCol="0" anchor="ctr"/>
@@ -5689,9 +5569,9 @@
                 <a:solidFill>
                   <a:srgbClr val="1A2E1A"/>
                 </a:solidFill>
-                <a:latin typeface="Consolas" pitchFamily="34" charset="0"/>
-                <a:ea typeface="Consolas" pitchFamily="34" charset="-122"/>
-                <a:cs typeface="Consolas" pitchFamily="34" charset="-120"/>
+                <a:latin typeface="Consolas" panose="020B0609020204030204" pitchFamily="34" charset="0"/>
+                <a:ea typeface="Consolas" panose="020B0609020204030204" pitchFamily="34" charset="-122"/>
+                <a:cs typeface="Consolas" panose="020B0609020204030204" pitchFamily="34" charset="-120"/>
               </a:rPr>
               <a:t>db_admin</a:t>
             </a:r>
@@ -5714,7 +5594,6 @@
             <a:avLst/>
           </a:prstGeom>
           <a:noFill/>
-          <a:ln/>
         </p:spPr>
         <p:txBody>
           <a:bodyPr wrap="square" lIns="0" tIns="0" rIns="0" bIns="0" rtlCol="0" anchor="ctr"/>
@@ -5728,9 +5607,9 @@
                 <a:solidFill>
                   <a:srgbClr val="8FAF72"/>
                 </a:solidFill>
-                <a:latin typeface="Calibri" pitchFamily="34" charset="0"/>
-                <a:ea typeface="Calibri" pitchFamily="34" charset="-122"/>
-                <a:cs typeface="Calibri" pitchFamily="34" charset="-120"/>
+                <a:latin typeface="Calibri" panose="020F0502020204030204" pitchFamily="34" charset="0"/>
+                <a:ea typeface="Calibri" panose="020F0502020204030204" pitchFamily="34" charset="-122"/>
+                <a:cs typeface="Calibri" panose="020F0502020204030204" pitchFamily="34" charset="-120"/>
               </a:rPr>
               <a:t>Superuser</a:t>
             </a:r>
@@ -5753,7 +5632,6 @@
             <a:avLst/>
           </a:prstGeom>
           <a:noFill/>
-          <a:ln/>
         </p:spPr>
         <p:txBody>
           <a:bodyPr wrap="square" rtlCol="0" anchor="t"/>
@@ -5771,9 +5649,9 @@
                 <a:solidFill>
                   <a:srgbClr val="FFFFFF"/>
                 </a:solidFill>
-                <a:latin typeface="Calibri" pitchFamily="34" charset="0"/>
-                <a:ea typeface="Calibri" pitchFamily="34" charset="-122"/>
-                <a:cs typeface="Calibri" pitchFamily="34" charset="-120"/>
+                <a:latin typeface="Calibri" panose="020F0502020204030204" pitchFamily="34" charset="0"/>
+                <a:ea typeface="Calibri" panose="020F0502020204030204" pitchFamily="34" charset="-122"/>
+                <a:cs typeface="Calibri" panose="020F0502020204030204" pitchFamily="34" charset="-120"/>
               </a:rPr>
               <a:t>Full DDL &amp; DML on all tables</a:t>
             </a:r>
@@ -5792,9 +5670,9 @@
                 <a:solidFill>
                   <a:srgbClr val="FFFFFF"/>
                 </a:solidFill>
-                <a:latin typeface="Calibri" pitchFamily="34" charset="0"/>
-                <a:ea typeface="Calibri" pitchFamily="34" charset="-122"/>
-                <a:cs typeface="Calibri" pitchFamily="34" charset="-120"/>
+                <a:latin typeface="Calibri" panose="020F0502020204030204" pitchFamily="34" charset="0"/>
+                <a:ea typeface="Calibri" panose="020F0502020204030204" pitchFamily="34" charset="-122"/>
+                <a:cs typeface="Calibri" panose="020F0502020204030204" pitchFamily="34" charset="-120"/>
               </a:rPr>
               <a:t>Create/drop users &amp; roles</a:t>
             </a:r>
@@ -5813,9 +5691,9 @@
                 <a:solidFill>
                   <a:srgbClr val="FFFFFF"/>
                 </a:solidFill>
-                <a:latin typeface="Calibri" pitchFamily="34" charset="0"/>
-                <a:ea typeface="Calibri" pitchFamily="34" charset="-122"/>
-                <a:cs typeface="Calibri" pitchFamily="34" charset="-120"/>
+                <a:latin typeface="Calibri" panose="020F0502020204030204" pitchFamily="34" charset="0"/>
+                <a:ea typeface="Calibri" panose="020F0502020204030204" pitchFamily="34" charset="-122"/>
+                <a:cs typeface="Calibri" panose="020F0502020204030204" pitchFamily="34" charset="-120"/>
               </a:rPr>
               <a:t>Manage backups &amp; binary logs</a:t>
             </a:r>
@@ -5888,7 +5766,6 @@
             <a:avLst/>
           </a:prstGeom>
           <a:noFill/>
-          <a:ln/>
         </p:spPr>
         <p:txBody>
           <a:bodyPr wrap="square" lIns="0" tIns="0" rIns="0" bIns="0" rtlCol="0" anchor="ctr"/>
@@ -5902,9 +5779,9 @@
                 <a:solidFill>
                   <a:srgbClr val="1A2E1A"/>
                 </a:solidFill>
-                <a:latin typeface="Consolas" pitchFamily="34" charset="0"/>
-                <a:ea typeface="Consolas" pitchFamily="34" charset="-122"/>
-                <a:cs typeface="Consolas" pitchFamily="34" charset="-120"/>
+                <a:latin typeface="Consolas" panose="020B0609020204030204" pitchFamily="34" charset="0"/>
+                <a:ea typeface="Consolas" panose="020B0609020204030204" pitchFamily="34" charset="-122"/>
+                <a:cs typeface="Consolas" panose="020B0609020204030204" pitchFamily="34" charset="-120"/>
               </a:rPr>
               <a:t>ministry_official</a:t>
             </a:r>
@@ -5927,7 +5804,6 @@
             <a:avLst/>
           </a:prstGeom>
           <a:noFill/>
-          <a:ln/>
         </p:spPr>
         <p:txBody>
           <a:bodyPr wrap="square" lIns="0" tIns="0" rIns="0" bIns="0" rtlCol="0" anchor="ctr"/>
@@ -5941,9 +5817,9 @@
                 <a:solidFill>
                   <a:srgbClr val="8FAF72"/>
                 </a:solidFill>
-                <a:latin typeface="Calibri" pitchFamily="34" charset="0"/>
-                <a:ea typeface="Calibri" pitchFamily="34" charset="-122"/>
-                <a:cs typeface="Calibri" pitchFamily="34" charset="-120"/>
+                <a:latin typeface="Calibri" panose="020F0502020204030204" pitchFamily="34" charset="0"/>
+                <a:ea typeface="Calibri" panose="020F0502020204030204" pitchFamily="34" charset="-122"/>
+                <a:cs typeface="Calibri" panose="020F0502020204030204" pitchFamily="34" charset="-120"/>
               </a:rPr>
               <a:t>Operations &amp; Logistics</a:t>
             </a:r>
@@ -5966,7 +5842,6 @@
             <a:avLst/>
           </a:prstGeom>
           <a:noFill/>
-          <a:ln/>
         </p:spPr>
         <p:txBody>
           <a:bodyPr wrap="square" rtlCol="0" anchor="t"/>
@@ -5984,9 +5859,9 @@
                 <a:solidFill>
                   <a:srgbClr val="FFFFFF"/>
                 </a:solidFill>
-                <a:latin typeface="Calibri" pitchFamily="34" charset="0"/>
-                <a:ea typeface="Calibri" pitchFamily="34" charset="-122"/>
-                <a:cs typeface="Calibri" pitchFamily="34" charset="-120"/>
+                <a:latin typeface="Calibri" panose="020F0502020204030204" pitchFamily="34" charset="0"/>
+                <a:ea typeface="Calibri" panose="020F0502020204030204" pitchFamily="34" charset="-122"/>
+                <a:cs typeface="Calibri" panose="020F0502020204030204" pitchFamily="34" charset="-120"/>
               </a:rPr>
               <a:t>INSERT / UPDATE on distributions</a:t>
             </a:r>
@@ -6005,9 +5880,9 @@
                 <a:solidFill>
                   <a:srgbClr val="FFFFFF"/>
                 </a:solidFill>
-                <a:latin typeface="Calibri" pitchFamily="34" charset="0"/>
-                <a:ea typeface="Calibri" pitchFamily="34" charset="-122"/>
-                <a:cs typeface="Calibri" pitchFamily="34" charset="-120"/>
+                <a:latin typeface="Calibri" panose="020F0502020204030204" pitchFamily="34" charset="0"/>
+                <a:ea typeface="Calibri" panose="020F0502020204030204" pitchFamily="34" charset="-122"/>
+                <a:cs typeface="Calibri" panose="020F0502020204030204" pitchFamily="34" charset="-120"/>
               </a:rPr>
               <a:t>SELECT on resources &amp; farms</a:t>
             </a:r>
@@ -6026,9 +5901,9 @@
                 <a:solidFill>
                   <a:srgbClr val="FFFFFF"/>
                 </a:solidFill>
-                <a:latin typeface="Calibri" pitchFamily="34" charset="0"/>
-                <a:ea typeface="Calibri" pitchFamily="34" charset="-122"/>
-                <a:cs typeface="Calibri" pitchFamily="34" charset="-120"/>
+                <a:latin typeface="Calibri" panose="020F0502020204030204" pitchFamily="34" charset="0"/>
+                <a:ea typeface="Calibri" panose="020F0502020204030204" pitchFamily="34" charset="-122"/>
+                <a:cs typeface="Calibri" panose="020F0502020204030204" pitchFamily="34" charset="-120"/>
               </a:rPr>
               <a:t>Approve resource handovers</a:t>
             </a:r>
@@ -6101,7 +5976,6 @@
             <a:avLst/>
           </a:prstGeom>
           <a:noFill/>
-          <a:ln/>
         </p:spPr>
         <p:txBody>
           <a:bodyPr wrap="square" lIns="0" tIns="0" rIns="0" bIns="0" rtlCol="0" anchor="ctr"/>
@@ -6115,9 +5989,9 @@
                 <a:solidFill>
                   <a:srgbClr val="1A2E1A"/>
                 </a:solidFill>
-                <a:latin typeface="Consolas" pitchFamily="34" charset="0"/>
-                <a:ea typeface="Consolas" pitchFamily="34" charset="-122"/>
-                <a:cs typeface="Consolas" pitchFamily="34" charset="-120"/>
+                <a:latin typeface="Consolas" panose="020B0609020204030204" pitchFamily="34" charset="0"/>
+                <a:ea typeface="Consolas" panose="020B0609020204030204" pitchFamily="34" charset="-122"/>
+                <a:cs typeface="Consolas" panose="020B0609020204030204" pitchFamily="34" charset="-120"/>
               </a:rPr>
               <a:t>extension_worker</a:t>
             </a:r>
@@ -6140,7 +6014,6 @@
             <a:avLst/>
           </a:prstGeom>
           <a:noFill/>
-          <a:ln/>
         </p:spPr>
         <p:txBody>
           <a:bodyPr wrap="square" lIns="0" tIns="0" rIns="0" bIns="0" rtlCol="0" anchor="ctr"/>
@@ -6154,9 +6027,9 @@
                 <a:solidFill>
                   <a:srgbClr val="8FAF72"/>
                 </a:solidFill>
-                <a:latin typeface="Calibri" pitchFamily="34" charset="0"/>
-                <a:ea typeface="Calibri" pitchFamily="34" charset="-122"/>
-                <a:cs typeface="Calibri" pitchFamily="34" charset="-120"/>
+                <a:latin typeface="Calibri" panose="020F0502020204030204" pitchFamily="34" charset="0"/>
+                <a:ea typeface="Calibri" panose="020F0502020204030204" pitchFamily="34" charset="-122"/>
+                <a:cs typeface="Calibri" panose="020F0502020204030204" pitchFamily="34" charset="-120"/>
               </a:rPr>
               <a:t>Field Reporting</a:t>
             </a:r>
@@ -6179,7 +6052,6 @@
             <a:avLst/>
           </a:prstGeom>
           <a:noFill/>
-          <a:ln/>
         </p:spPr>
         <p:txBody>
           <a:bodyPr wrap="square" rtlCol="0" anchor="t"/>
@@ -6197,9 +6069,9 @@
                 <a:solidFill>
                   <a:srgbClr val="FFFFFF"/>
                 </a:solidFill>
-                <a:latin typeface="Calibri" pitchFamily="34" charset="0"/>
-                <a:ea typeface="Calibri" pitchFamily="34" charset="-122"/>
-                <a:cs typeface="Calibri" pitchFamily="34" charset="-120"/>
+                <a:latin typeface="Calibri" panose="020F0502020204030204" pitchFamily="34" charset="0"/>
+                <a:ea typeface="Calibri" panose="020F0502020204030204" pitchFamily="34" charset="-122"/>
+                <a:cs typeface="Calibri" panose="020F0502020204030204" pitchFamily="34" charset="-120"/>
               </a:rPr>
               <a:t>INSERT into advice_sessions</a:t>
             </a:r>
@@ -6218,9 +6090,9 @@
                 <a:solidFill>
                   <a:srgbClr val="FFFFFF"/>
                 </a:solidFill>
-                <a:latin typeface="Calibri" pitchFamily="34" charset="0"/>
-                <a:ea typeface="Calibri" pitchFamily="34" charset="-122"/>
-                <a:cs typeface="Calibri" pitchFamily="34" charset="-120"/>
+                <a:latin typeface="Calibri" panose="020F0502020204030204" pitchFamily="34" charset="0"/>
+                <a:ea typeface="Calibri" panose="020F0502020204030204" pitchFamily="34" charset="-122"/>
+                <a:cs typeface="Calibri" panose="020F0502020204030204" pitchFamily="34" charset="-120"/>
               </a:rPr>
               <a:t>SELECT on farms &amp; farmers</a:t>
             </a:r>
@@ -6239,9 +6111,9 @@
                 <a:solidFill>
                   <a:srgbClr val="FFFFFF"/>
                 </a:solidFill>
-                <a:latin typeface="Calibri" pitchFamily="34" charset="0"/>
-                <a:ea typeface="Calibri" pitchFamily="34" charset="-122"/>
-                <a:cs typeface="Calibri" pitchFamily="34" charset="-120"/>
+                <a:latin typeface="Calibri" panose="020F0502020204030204" pitchFamily="34" charset="0"/>
+                <a:ea typeface="Calibri" panose="020F0502020204030204" pitchFamily="34" charset="-122"/>
+                <a:cs typeface="Calibri" panose="020F0502020204030204" pitchFamily="34" charset="-120"/>
               </a:rPr>
               <a:t>View vw_farm_inventory</a:t>
             </a:r>
@@ -6289,7 +6161,6 @@
             <a:avLst/>
           </a:prstGeom>
           <a:noFill/>
-          <a:ln/>
         </p:spPr>
         <p:txBody>
           <a:bodyPr wrap="square" rtlCol="0" anchor="ctr"/>
@@ -6303,9 +6174,9 @@
                 <a:solidFill>
                   <a:srgbClr val="8FAF72"/>
                 </a:solidFill>
-                <a:latin typeface="Calibri" pitchFamily="34" charset="0"/>
-                <a:ea typeface="Calibri" pitchFamily="34" charset="-122"/>
-                <a:cs typeface="Calibri" pitchFamily="34" charset="-120"/>
+                <a:latin typeface="Calibri" panose="020F0502020204030204" pitchFamily="34" charset="0"/>
+                <a:ea typeface="Calibri" panose="020F0502020204030204" pitchFamily="34" charset="-122"/>
+                <a:cs typeface="Calibri" panose="020F0502020204030204" pitchFamily="34" charset="-120"/>
               </a:rPr>
               <a:t>View: </a:t>
             </a:r>
@@ -6314,9 +6185,9 @@
                 <a:solidFill>
                   <a:srgbClr val="8FAF72"/>
                 </a:solidFill>
-                <a:latin typeface="Consolas" pitchFamily="34" charset="0"/>
-                <a:ea typeface="Consolas" pitchFamily="34" charset="-122"/>
-                <a:cs typeface="Consolas" pitchFamily="34" charset="-120"/>
+                <a:latin typeface="Consolas" panose="020B0609020204030204" pitchFamily="34" charset="0"/>
+                <a:ea typeface="Consolas" panose="020B0609020204030204" pitchFamily="34" charset="-122"/>
+                <a:cs typeface="Consolas" panose="020B0609020204030204" pitchFamily="34" charset="-120"/>
               </a:rPr>
               <a:t>vw_farm_inventory</a:t>
             </a:r>
@@ -6325,9 +6196,9 @@
                 <a:solidFill>
                   <a:srgbClr val="8FAF72"/>
                 </a:solidFill>
-                <a:latin typeface="Calibri" pitchFamily="34" charset="0"/>
-                <a:ea typeface="Calibri" pitchFamily="34" charset="-122"/>
-                <a:cs typeface="Calibri" pitchFamily="34" charset="-120"/>
+                <a:latin typeface="Calibri" panose="020F0502020204030204" pitchFamily="34" charset="0"/>
+                <a:ea typeface="Calibri" panose="020F0502020204030204" pitchFamily="34" charset="-122"/>
+                <a:cs typeface="Calibri" panose="020F0502020204030204" pitchFamily="34" charset="-120"/>
               </a:rPr>
               <a:t>  —  Hides complex joins; exposes only role-relevant columns to non-technical users</a:t>
             </a:r>
@@ -6345,7 +6216,7 @@
 
 <file path=ppt/slides/slide6.xml><?xml version="1.0" encoding="utf-8"?>
 <p:sld xmlns:a="http://schemas.openxmlformats.org/drawingml/2006/main" xmlns:r="http://schemas.openxmlformats.org/officeDocument/2006/relationships" xmlns:p="http://schemas.openxmlformats.org/presentationml/2006/main">
-  <p:cSld name="Slide 7">
+  <p:cSld>
     <p:bg>
       <p:bgPr>
         <a:solidFill>
@@ -6408,7 +6279,6 @@
             <a:avLst/>
           </a:prstGeom>
           <a:noFill/>
-          <a:ln/>
         </p:spPr>
         <p:txBody>
           <a:bodyPr wrap="square" lIns="0" tIns="0" rIns="0" bIns="0" rtlCol="0" anchor="ctr"/>
@@ -6422,9 +6292,9 @@
                 <a:solidFill>
                   <a:srgbClr val="1A2E1A"/>
                 </a:solidFill>
-                <a:latin typeface="Trebuchet MS" pitchFamily="34" charset="0"/>
-                <a:ea typeface="Trebuchet MS" pitchFamily="34" charset="-122"/>
-                <a:cs typeface="Trebuchet MS" pitchFamily="34" charset="-120"/>
+                <a:latin typeface="Trebuchet MS" panose="020B0603020202020204" pitchFamily="34" charset="0"/>
+                <a:ea typeface="Trebuchet MS" panose="020B0603020202020204" pitchFamily="34" charset="-122"/>
+                <a:cs typeface="Trebuchet MS" panose="020B0603020202020204" pitchFamily="34" charset="-120"/>
               </a:rPr>
               <a:t>5. Automation: Triggers &amp; Procedures</a:t>
             </a:r>
@@ -6470,7 +6340,6 @@
             <a:avLst/>
           </a:prstGeom>
           <a:noFill/>
-          <a:ln/>
         </p:spPr>
         <p:txBody>
           <a:bodyPr wrap="square" rtlCol="0" anchor="ctr"/>
@@ -6484,9 +6353,9 @@
                 <a:solidFill>
                   <a:srgbClr val="4A6741"/>
                 </a:solidFill>
-                <a:latin typeface="Calibri" pitchFamily="34" charset="0"/>
-                <a:ea typeface="Calibri" pitchFamily="34" charset="-122"/>
-                <a:cs typeface="Calibri" pitchFamily="34" charset="-120"/>
+                <a:latin typeface="Calibri" panose="020F0502020204030204" pitchFamily="34" charset="0"/>
+                <a:ea typeface="Calibri" panose="020F0502020204030204" pitchFamily="34" charset="-122"/>
+                <a:cs typeface="Calibri" panose="020F0502020204030204" pitchFamily="34" charset="-120"/>
               </a:rPr>
               <a:t>7 / 10</a:t>
             </a:r>
@@ -6566,7 +6435,6 @@
             <a:avLst/>
           </a:prstGeom>
           <a:noFill/>
-          <a:ln/>
         </p:spPr>
         <p:txBody>
           <a:bodyPr wrap="square" lIns="0" tIns="0" rIns="0" bIns="0" rtlCol="0" anchor="ctr"/>
@@ -6580,9 +6448,9 @@
                 <a:solidFill>
                   <a:srgbClr val="FFFFFF"/>
                 </a:solidFill>
-                <a:latin typeface="Consolas" pitchFamily="34" charset="0"/>
-                <a:ea typeface="Consolas" pitchFamily="34" charset="-122"/>
-                <a:cs typeface="Consolas" pitchFamily="34" charset="-120"/>
+                <a:latin typeface="Consolas" panose="020B0609020204030204" pitchFamily="34" charset="0"/>
+                <a:ea typeface="Consolas" panose="020B0609020204030204" pitchFamily="34" charset="-122"/>
+                <a:cs typeface="Consolas" panose="020B0609020204030204" pitchFamily="34" charset="-120"/>
               </a:rPr>
               <a:t>TRIGGER:  tr_UpdateResourceStock</a:t>
             </a:r>
@@ -6605,7 +6473,6 @@
             <a:avLst/>
           </a:prstGeom>
           <a:noFill/>
-          <a:ln/>
         </p:spPr>
         <p:txBody>
           <a:bodyPr wrap="square" rtlCol="0" anchor="t"/>
@@ -6619,9 +6486,9 @@
                 <a:solidFill>
                   <a:srgbClr val="1A2E1A"/>
                 </a:solidFill>
-                <a:latin typeface="Calibri" pitchFamily="34" charset="0"/>
-                <a:ea typeface="Calibri" pitchFamily="34" charset="-122"/>
-                <a:cs typeface="Calibri" pitchFamily="34" charset="-120"/>
+                <a:latin typeface="Calibri" panose="020F0502020204030204" pitchFamily="34" charset="0"/>
+                <a:ea typeface="Calibri" panose="020F0502020204030204" pitchFamily="34" charset="-122"/>
+                <a:cs typeface="Calibri" panose="020F0502020204030204" pitchFamily="34" charset="-120"/>
               </a:rPr>
               <a:t>Fires:  </a:t>
             </a:r>
@@ -6630,9 +6497,9 @@
                 <a:solidFill>
                   <a:srgbClr val="1A2E1A"/>
                 </a:solidFill>
-                <a:latin typeface="Calibri" pitchFamily="34" charset="0"/>
-                <a:ea typeface="Calibri" pitchFamily="34" charset="-122"/>
-                <a:cs typeface="Calibri" pitchFamily="34" charset="-120"/>
+                <a:latin typeface="Calibri" panose="020F0502020204030204" pitchFamily="34" charset="0"/>
+                <a:ea typeface="Calibri" panose="020F0502020204030204" pitchFamily="34" charset="-122"/>
+                <a:cs typeface="Calibri" panose="020F0502020204030204" pitchFamily="34" charset="-120"/>
               </a:rPr>
               <a:t>AFTER INSERT on distributions</a:t>
             </a:r>
@@ -6647,9 +6514,9 @@
                 <a:solidFill>
                   <a:srgbClr val="1A2E1A"/>
                 </a:solidFill>
-                <a:latin typeface="Calibri" pitchFamily="34" charset="0"/>
-                <a:ea typeface="Calibri" pitchFamily="34" charset="-122"/>
-                <a:cs typeface="Calibri" pitchFamily="34" charset="-120"/>
+                <a:latin typeface="Calibri" panose="020F0502020204030204" pitchFamily="34" charset="0"/>
+                <a:ea typeface="Calibri" panose="020F0502020204030204" pitchFamily="34" charset="-122"/>
+                <a:cs typeface="Calibri" panose="020F0502020204030204" pitchFamily="34" charset="-120"/>
               </a:rPr>
               <a:t>Action: </a:t>
             </a:r>
@@ -6664,9 +6531,9 @@
                 <a:solidFill>
                   <a:srgbClr val="1A2E1A"/>
                 </a:solidFill>
-                <a:latin typeface="Calibri" pitchFamily="34" charset="0"/>
-                <a:ea typeface="Calibri" pitchFamily="34" charset="-122"/>
-                <a:cs typeface="Calibri" pitchFamily="34" charset="-120"/>
+                <a:latin typeface="Calibri" panose="020F0502020204030204" pitchFamily="34" charset="0"/>
+                <a:ea typeface="Calibri" panose="020F0502020204030204" pitchFamily="34" charset="-122"/>
+                <a:cs typeface="Calibri" panose="020F0502020204030204" pitchFamily="34" charset="-120"/>
               </a:rPr>
               <a:t>Automatically decrements stock_quantity in the resources table</a:t>
             </a:r>
@@ -6681,9 +6548,9 @@
                 <a:solidFill>
                   <a:srgbClr val="1A2E1A"/>
                 </a:solidFill>
-                <a:latin typeface="Calibri" pitchFamily="34" charset="0"/>
-                <a:ea typeface="Calibri" pitchFamily="34" charset="-122"/>
-                <a:cs typeface="Calibri" pitchFamily="34" charset="-120"/>
+                <a:latin typeface="Calibri" panose="020F0502020204030204" pitchFamily="34" charset="0"/>
+                <a:ea typeface="Calibri" panose="020F0502020204030204" pitchFamily="34" charset="-122"/>
+                <a:cs typeface="Calibri" panose="020F0502020204030204" pitchFamily="34" charset="-120"/>
               </a:rPr>
               <a:t>Guard:  </a:t>
             </a:r>
@@ -6698,9 +6565,9 @@
                 <a:solidFill>
                   <a:srgbClr val="1A2E1A"/>
                 </a:solidFill>
-                <a:latin typeface="Calibri" pitchFamily="34" charset="0"/>
-                <a:ea typeface="Calibri" pitchFamily="34" charset="-122"/>
-                <a:cs typeface="Calibri" pitchFamily="34" charset="-120"/>
+                <a:latin typeface="Calibri" panose="020F0502020204030204" pitchFamily="34" charset="0"/>
+                <a:ea typeface="Calibri" panose="020F0502020204030204" pitchFamily="34" charset="-122"/>
+                <a:cs typeface="Calibri" panose="020F0502020204030204" pitchFamily="34" charset="-120"/>
               </a:rPr>
               <a:t>Raises error if distribution quantity exceeds available stock</a:t>
             </a:r>
@@ -6715,9 +6582,9 @@
                 <a:solidFill>
                   <a:srgbClr val="1A2E1A"/>
                 </a:solidFill>
-                <a:latin typeface="Calibri" pitchFamily="34" charset="0"/>
-                <a:ea typeface="Calibri" pitchFamily="34" charset="-122"/>
-                <a:cs typeface="Calibri" pitchFamily="34" charset="-120"/>
+                <a:latin typeface="Calibri" panose="020F0502020204030204" pitchFamily="34" charset="0"/>
+                <a:ea typeface="Calibri" panose="020F0502020204030204" pitchFamily="34" charset="-122"/>
+                <a:cs typeface="Calibri" panose="020F0502020204030204" pitchFamily="34" charset="-120"/>
               </a:rPr>
               <a:t>Benefit:</a:t>
             </a:r>
@@ -6732,9 +6599,9 @@
                 <a:solidFill>
                   <a:srgbClr val="1A2E1A"/>
                 </a:solidFill>
-                <a:latin typeface="Calibri" pitchFamily="34" charset="0"/>
-                <a:ea typeface="Calibri" pitchFamily="34" charset="-122"/>
-                <a:cs typeface="Calibri" pitchFamily="34" charset="-120"/>
+                <a:latin typeface="Calibri" panose="020F0502020204030204" pitchFamily="34" charset="0"/>
+                <a:ea typeface="Calibri" panose="020F0502020204030204" pitchFamily="34" charset="-122"/>
+                <a:cs typeface="Calibri" panose="020F0502020204030204" pitchFamily="34" charset="-120"/>
               </a:rPr>
               <a:t>No manual stock updates required — prevents oversupply &amp; data drift</a:t>
             </a:r>
@@ -6814,7 +6681,6 @@
             <a:avLst/>
           </a:prstGeom>
           <a:noFill/>
-          <a:ln/>
         </p:spPr>
         <p:txBody>
           <a:bodyPr wrap="square" lIns="0" tIns="0" rIns="0" bIns="0" rtlCol="0" anchor="ctr"/>
@@ -6828,9 +6694,9 @@
                 <a:solidFill>
                   <a:srgbClr val="FFFFFF"/>
                 </a:solidFill>
-                <a:latin typeface="Consolas" pitchFamily="34" charset="0"/>
-                <a:ea typeface="Consolas" pitchFamily="34" charset="-122"/>
-                <a:cs typeface="Consolas" pitchFamily="34" charset="-120"/>
+                <a:latin typeface="Consolas" panose="020B0609020204030204" pitchFamily="34" charset="0"/>
+                <a:ea typeface="Consolas" panose="020B0609020204030204" pitchFamily="34" charset="-122"/>
+                <a:cs typeface="Consolas" panose="020B0609020204030204" pitchFamily="34" charset="-120"/>
               </a:rPr>
               <a:t>PROCEDURE:  sp_RecordDistribution</a:t>
             </a:r>
@@ -6853,7 +6719,6 @@
             <a:avLst/>
           </a:prstGeom>
           <a:noFill/>
-          <a:ln/>
         </p:spPr>
         <p:txBody>
           <a:bodyPr wrap="square" rtlCol="0" anchor="t"/>
@@ -6867,9 +6732,9 @@
                 <a:solidFill>
                   <a:srgbClr val="1A2E1A"/>
                 </a:solidFill>
-                <a:latin typeface="Calibri" pitchFamily="34" charset="0"/>
-                <a:ea typeface="Calibri" pitchFamily="34" charset="-122"/>
-                <a:cs typeface="Calibri" pitchFamily="34" charset="-120"/>
+                <a:latin typeface="Calibri" panose="020F0502020204030204" pitchFamily="34" charset="0"/>
+                <a:ea typeface="Calibri" panose="020F0502020204030204" pitchFamily="34" charset="-122"/>
+                <a:cs typeface="Calibri" panose="020F0502020204030204" pitchFamily="34" charset="-120"/>
               </a:rPr>
               <a:t>Purpose: </a:t>
             </a:r>
@@ -6878,9 +6743,9 @@
                 <a:solidFill>
                   <a:srgbClr val="1A2E1A"/>
                 </a:solidFill>
-                <a:latin typeface="Calibri" pitchFamily="34" charset="0"/>
-                <a:ea typeface="Calibri" pitchFamily="34" charset="-122"/>
-                <a:cs typeface="Calibri" pitchFamily="34" charset="-120"/>
+                <a:latin typeface="Calibri" panose="020F0502020204030204" pitchFamily="34" charset="0"/>
+                <a:ea typeface="Calibri" panose="020F0502020204030204" pitchFamily="34" charset="-122"/>
+                <a:cs typeface="Calibri" panose="020F0502020204030204" pitchFamily="34" charset="-120"/>
               </a:rPr>
               <a:t>Safe, reusable interface for recording resource distributions</a:t>
             </a:r>
@@ -6895,9 +6760,9 @@
                 <a:solidFill>
                   <a:srgbClr val="1A2E1A"/>
                 </a:solidFill>
-                <a:latin typeface="Calibri" pitchFamily="34" charset="0"/>
-                <a:ea typeface="Calibri" pitchFamily="34" charset="-122"/>
-                <a:cs typeface="Calibri" pitchFamily="34" charset="-120"/>
+                <a:latin typeface="Calibri" panose="020F0502020204030204" pitchFamily="34" charset="0"/>
+                <a:ea typeface="Calibri" panose="020F0502020204030204" pitchFamily="34" charset="-122"/>
+                <a:cs typeface="Calibri" panose="020F0502020204030204" pitchFamily="34" charset="-120"/>
               </a:rPr>
               <a:t>Inputs:  </a:t>
             </a:r>
@@ -6912,9 +6777,9 @@
                 <a:solidFill>
                   <a:srgbClr val="1A2E1A"/>
                 </a:solidFill>
-                <a:latin typeface="Consolas" pitchFamily="34" charset="0"/>
-                <a:ea typeface="Consolas" pitchFamily="34" charset="-122"/>
-                <a:cs typeface="Consolas" pitchFamily="34" charset="-120"/>
+                <a:latin typeface="Consolas" panose="020B0609020204030204" pitchFamily="34" charset="0"/>
+                <a:ea typeface="Consolas" panose="020B0609020204030204" pitchFamily="34" charset="-122"/>
+                <a:cs typeface="Consolas" panose="020B0609020204030204" pitchFamily="34" charset="-120"/>
               </a:rPr>
               <a:t>farm_id, resource_id, official_id, quantity, date</a:t>
             </a:r>
@@ -6929,9 +6794,9 @@
                 <a:solidFill>
                   <a:srgbClr val="1A2E1A"/>
                 </a:solidFill>
-                <a:latin typeface="Calibri" pitchFamily="34" charset="0"/>
-                <a:ea typeface="Calibri" pitchFamily="34" charset="-122"/>
-                <a:cs typeface="Calibri" pitchFamily="34" charset="-120"/>
+                <a:latin typeface="Calibri" panose="020F0502020204030204" pitchFamily="34" charset="0"/>
+                <a:ea typeface="Calibri" panose="020F0502020204030204" pitchFamily="34" charset="-122"/>
+                <a:cs typeface="Calibri" panose="020F0502020204030204" pitchFamily="34" charset="-120"/>
               </a:rPr>
               <a:t>Checks:  </a:t>
             </a:r>
@@ -6946,9 +6811,9 @@
                 <a:solidFill>
                   <a:srgbClr val="1A2E1A"/>
                 </a:solidFill>
-                <a:latin typeface="Calibri" pitchFamily="34" charset="0"/>
-                <a:ea typeface="Calibri" pitchFamily="34" charset="-122"/>
-                <a:cs typeface="Calibri" pitchFamily="34" charset="-120"/>
+                <a:latin typeface="Calibri" panose="020F0502020204030204" pitchFamily="34" charset="0"/>
+                <a:ea typeface="Calibri" panose="020F0502020204030204" pitchFamily="34" charset="-122"/>
+                <a:cs typeface="Calibri" panose="020F0502020204030204" pitchFamily="34" charset="-120"/>
               </a:rPr>
               <a:t>Validates stock availability before insert; raises error on out-of-stock</a:t>
             </a:r>
@@ -6963,9 +6828,9 @@
                 <a:solidFill>
                   <a:srgbClr val="1A2E1A"/>
                 </a:solidFill>
-                <a:latin typeface="Calibri" pitchFamily="34" charset="0"/>
-                <a:ea typeface="Calibri" pitchFamily="34" charset="-122"/>
-                <a:cs typeface="Calibri" pitchFamily="34" charset="-120"/>
+                <a:latin typeface="Calibri" panose="020F0502020204030204" pitchFamily="34" charset="0"/>
+                <a:ea typeface="Calibri" panose="020F0502020204030204" pitchFamily="34" charset="-122"/>
+                <a:cs typeface="Calibri" panose="020F0502020204030204" pitchFamily="34" charset="-120"/>
               </a:rPr>
               <a:t>Output:  </a:t>
             </a:r>
@@ -6980,9 +6845,9 @@
                 <a:solidFill>
                   <a:srgbClr val="1A2E1A"/>
                 </a:solidFill>
-                <a:latin typeface="Calibri" pitchFamily="34" charset="0"/>
-                <a:ea typeface="Calibri" pitchFamily="34" charset="-122"/>
-                <a:cs typeface="Calibri" pitchFamily="34" charset="-120"/>
+                <a:latin typeface="Calibri" panose="020F0502020204030204" pitchFamily="34" charset="0"/>
+                <a:ea typeface="Calibri" panose="020F0502020204030204" pitchFamily="34" charset="-122"/>
+                <a:cs typeface="Calibri" panose="020F0502020204030204" pitchFamily="34" charset="-120"/>
               </a:rPr>
               <a:t>Confirmation message with distribution record ID</a:t>
             </a:r>
@@ -6997,9 +6862,9 @@
                 <a:solidFill>
                   <a:srgbClr val="1A2E1A"/>
                 </a:solidFill>
-                <a:latin typeface="Calibri" pitchFamily="34" charset="0"/>
-                <a:ea typeface="Calibri" pitchFamily="34" charset="-122"/>
-                <a:cs typeface="Calibri" pitchFamily="34" charset="-120"/>
+                <a:latin typeface="Calibri" panose="020F0502020204030204" pitchFamily="34" charset="0"/>
+                <a:ea typeface="Calibri" panose="020F0502020204030204" pitchFamily="34" charset="-122"/>
+                <a:cs typeface="Calibri" panose="020F0502020204030204" pitchFamily="34" charset="-120"/>
               </a:rPr>
               <a:t>Benefit: </a:t>
             </a:r>
@@ -7014,9 +6879,9 @@
                 <a:solidFill>
                   <a:srgbClr val="1A2E1A"/>
                 </a:solidFill>
-                <a:latin typeface="Calibri" pitchFamily="34" charset="0"/>
-                <a:ea typeface="Calibri" pitchFamily="34" charset="-122"/>
-                <a:cs typeface="Calibri" pitchFamily="34" charset="-120"/>
+                <a:latin typeface="Calibri" panose="020F0502020204030204" pitchFamily="34" charset="0"/>
+                <a:ea typeface="Calibri" panose="020F0502020204030204" pitchFamily="34" charset="-122"/>
+                <a:cs typeface="Calibri" panose="020F0502020204030204" pitchFamily="34" charset="-120"/>
               </a:rPr>
               <a:t>Encapsulates business logic; prevents direct table manipulation</a:t>
             </a:r>
@@ -7034,7 +6899,7 @@
 
 <file path=ppt/slides/slide7.xml><?xml version="1.0" encoding="utf-8"?>
 <p:sld xmlns:a="http://schemas.openxmlformats.org/drawingml/2006/main" xmlns:r="http://schemas.openxmlformats.org/officeDocument/2006/relationships" xmlns:p="http://schemas.openxmlformats.org/presentationml/2006/main">
-  <p:cSld name="Slide 8">
+  <p:cSld>
     <p:bg>
       <p:bgPr>
         <a:solidFill>
@@ -7097,7 +6962,6 @@
             <a:avLst/>
           </a:prstGeom>
           <a:noFill/>
-          <a:ln/>
         </p:spPr>
         <p:txBody>
           <a:bodyPr wrap="square" lIns="0" tIns="0" rIns="0" bIns="0" rtlCol="0" anchor="ctr"/>
@@ -7111,9 +6975,9 @@
                 <a:solidFill>
                   <a:srgbClr val="1A2E1A"/>
                 </a:solidFill>
-                <a:latin typeface="Trebuchet MS" pitchFamily="34" charset="0"/>
-                <a:ea typeface="Trebuchet MS" pitchFamily="34" charset="-122"/>
-                <a:cs typeface="Trebuchet MS" pitchFamily="34" charset="-120"/>
+                <a:latin typeface="Trebuchet MS" panose="020B0603020202020204" pitchFamily="34" charset="0"/>
+                <a:ea typeface="Trebuchet MS" panose="020B0603020202020204" pitchFamily="34" charset="-122"/>
+                <a:cs typeface="Trebuchet MS" panose="020B0603020202020204" pitchFamily="34" charset="-120"/>
               </a:rPr>
               <a:t>6. Backup, Recovery &amp; Testing</a:t>
             </a:r>
@@ -7159,7 +7023,6 @@
             <a:avLst/>
           </a:prstGeom>
           <a:noFill/>
-          <a:ln/>
         </p:spPr>
         <p:txBody>
           <a:bodyPr wrap="square" rtlCol="0" anchor="ctr"/>
@@ -7173,9 +7036,9 @@
                 <a:solidFill>
                   <a:srgbClr val="4A6741"/>
                 </a:solidFill>
-                <a:latin typeface="Calibri" pitchFamily="34" charset="0"/>
-                <a:ea typeface="Calibri" pitchFamily="34" charset="-122"/>
-                <a:cs typeface="Calibri" pitchFamily="34" charset="-120"/>
+                <a:latin typeface="Calibri" panose="020F0502020204030204" pitchFamily="34" charset="0"/>
+                <a:ea typeface="Calibri" panose="020F0502020204030204" pitchFamily="34" charset="-122"/>
+                <a:cs typeface="Calibri" panose="020F0502020204030204" pitchFamily="34" charset="-120"/>
               </a:rPr>
               <a:t>8 / 10</a:t>
             </a:r>
@@ -7198,7 +7061,6 @@
             <a:avLst/>
           </a:prstGeom>
           <a:noFill/>
-          <a:ln/>
         </p:spPr>
         <p:txBody>
           <a:bodyPr wrap="square" rtlCol="0" anchor="ctr"/>
@@ -7212,9 +7074,9 @@
                 <a:solidFill>
                   <a:srgbClr val="2C5F2D"/>
                 </a:solidFill>
-                <a:latin typeface="Trebuchet MS" pitchFamily="34" charset="0"/>
-                <a:ea typeface="Trebuchet MS" pitchFamily="34" charset="-122"/>
-                <a:cs typeface="Trebuchet MS" pitchFamily="34" charset="-120"/>
+                <a:latin typeface="Trebuchet MS" panose="020B0603020202020204" pitchFamily="34" charset="0"/>
+                <a:ea typeface="Trebuchet MS" panose="020B0603020202020204" pitchFamily="34" charset="-122"/>
+                <a:cs typeface="Trebuchet MS" panose="020B0603020202020204" pitchFamily="34" charset="-120"/>
               </a:rPr>
               <a:t>Backup &amp; Recovery Strategy</a:t>
             </a:r>
@@ -7237,7 +7099,6 @@
             <a:avLst/>
           </a:prstGeom>
           <a:noFill/>
-          <a:ln/>
         </p:spPr>
         <p:txBody>
           <a:bodyPr wrap="square" rtlCol="0" anchor="ctr"/>
@@ -7255,11 +7116,11 @@
                 <a:solidFill>
                   <a:srgbClr val="1A2E1A"/>
                 </a:solidFill>
-                <a:latin typeface="Calibri" pitchFamily="34" charset="0"/>
-                <a:ea typeface="Calibri" pitchFamily="34" charset="-122"/>
-                <a:cs typeface="Calibri" pitchFamily="34" charset="-120"/>
-              </a:rPr>
-              <a:t>Full Backup</a:t>
+                <a:latin typeface="Calibri" panose="020F0502020204030204" pitchFamily="34" charset="0"/>
+                <a:ea typeface="Calibri" panose="020F0502020204030204" pitchFamily="34" charset="-122"/>
+                <a:cs typeface="Calibri" panose="020F0502020204030204" pitchFamily="34" charset="-120"/>
+              </a:rPr>
+              <a:t>Full Automated Backup</a:t>
             </a:r>
             <a:endParaRPr lang="en-US" sz="1250" dirty="0"/>
           </a:p>
@@ -7276,9 +7137,9 @@
                 <a:solidFill>
                   <a:srgbClr val="1A2E1A"/>
                 </a:solidFill>
-                <a:latin typeface="Calibri" pitchFamily="34" charset="0"/>
-                <a:ea typeface="Calibri" pitchFamily="34" charset="-122"/>
-                <a:cs typeface="Calibri" pitchFamily="34" charset="-120"/>
+                <a:latin typeface="Calibri" panose="020F0502020204030204" pitchFamily="34" charset="0"/>
+                <a:ea typeface="Calibri" panose="020F0502020204030204" pitchFamily="34" charset="-122"/>
+                <a:cs typeface="Calibri" panose="020F0502020204030204" pitchFamily="34" charset="-120"/>
               </a:rPr>
               <a:t>Daily mysqldump of coffee_production schema</a:t>
             </a:r>
@@ -7297,9 +7158,9 @@
                 <a:solidFill>
                   <a:srgbClr val="1A2E1A"/>
                 </a:solidFill>
-                <a:latin typeface="Calibri" pitchFamily="34" charset="0"/>
-                <a:ea typeface="Calibri" pitchFamily="34" charset="-122"/>
-                <a:cs typeface="Calibri" pitchFamily="34" charset="-120"/>
+                <a:latin typeface="Calibri" panose="020F0502020204030204" pitchFamily="34" charset="0"/>
+                <a:ea typeface="Calibri" panose="020F0502020204030204" pitchFamily="34" charset="-122"/>
+                <a:cs typeface="Calibri" panose="020F0502020204030204" pitchFamily="34" charset="-120"/>
               </a:rPr>
               <a:t>Point-in-Time Recovery</a:t>
             </a:r>
@@ -7318,50 +7179,11 @@
                 <a:solidFill>
                   <a:srgbClr val="1A2E1A"/>
                 </a:solidFill>
-                <a:latin typeface="Calibri" pitchFamily="34" charset="0"/>
-                <a:ea typeface="Calibri" pitchFamily="34" charset="-122"/>
-                <a:cs typeface="Calibri" pitchFamily="34" charset="-120"/>
-              </a:rPr>
-              <a:t>Enabled via MySQL binary logs</a:t>
-            </a:r>
-            <a:endParaRPr lang="en-US" sz="1250" dirty="0"/>
-          </a:p>
-          <a:p>
-            <a:pPr marL="342900" indent="-342900">
-              <a:spcAft>
-                <a:spcPts val="500"/>
-              </a:spcAft>
-              <a:buSzPct val="100000"/>
-              <a:buChar char="•"/>
-            </a:pPr>
-            <a:r>
-              <a:rPr lang="en-US" sz="1250" b="1" dirty="0">
-                <a:solidFill>
-                  <a:srgbClr val="1A2E1A"/>
-                </a:solidFill>
-                <a:latin typeface="Calibri" pitchFamily="34" charset="0"/>
-                <a:ea typeface="Calibri" pitchFamily="34" charset="-122"/>
-                <a:cs typeface="Calibri" pitchFamily="34" charset="-120"/>
-              </a:rPr>
-              <a:t>Recovery Command:</a:t>
-            </a:r>
-            <a:endParaRPr lang="en-US" sz="1250" dirty="0"/>
-          </a:p>
-          <a:p>
-            <a:pPr marL="685800" lvl="1" indent="-342900">
-              <a:buSzPct val="100000"/>
-              <a:buChar char="•"/>
-            </a:pPr>
-            <a:r>
-              <a:rPr lang="en-US" sz="1050" dirty="0">
-                <a:solidFill>
-                  <a:srgbClr val="1A2E1A"/>
-                </a:solidFill>
-                <a:latin typeface="Consolas" pitchFamily="34" charset="0"/>
-                <a:ea typeface="Consolas" pitchFamily="34" charset="-122"/>
-                <a:cs typeface="Consolas" pitchFamily="34" charset="-120"/>
-              </a:rPr>
-              <a:t>mysql -u [user] -p coffee_production &lt; backup.sql</a:t>
+                <a:latin typeface="Calibri" panose="020F0502020204030204" pitchFamily="34" charset="0"/>
+                <a:ea typeface="Calibri" panose="020F0502020204030204" pitchFamily="34" charset="-122"/>
+                <a:cs typeface="Calibri" panose="020F0502020204030204" pitchFamily="34" charset="-120"/>
+              </a:rPr>
+              <a:t>Enabled via Windows Task scheduler</a:t>
             </a:r>
             <a:endParaRPr lang="en-US" sz="1250" dirty="0"/>
           </a:p>
@@ -7405,7 +7227,6 @@
             <a:avLst/>
           </a:prstGeom>
           <a:noFill/>
-          <a:ln/>
         </p:spPr>
         <p:txBody>
           <a:bodyPr wrap="square" rtlCol="0" anchor="ctr"/>
@@ -7419,9 +7240,9 @@
                 <a:solidFill>
                   <a:srgbClr val="2C5F2D"/>
                 </a:solidFill>
-                <a:latin typeface="Trebuchet MS" pitchFamily="34" charset="0"/>
-                <a:ea typeface="Trebuchet MS" pitchFamily="34" charset="-122"/>
-                <a:cs typeface="Trebuchet MS" pitchFamily="34" charset="-120"/>
+                <a:latin typeface="Trebuchet MS" panose="020B0603020202020204" pitchFamily="34" charset="0"/>
+                <a:ea typeface="Trebuchet MS" panose="020B0603020202020204" pitchFamily="34" charset="-122"/>
+                <a:cs typeface="Trebuchet MS" panose="020B0603020202020204" pitchFamily="34" charset="-120"/>
               </a:rPr>
               <a:t>System Testing</a:t>
             </a:r>
@@ -7444,7 +7265,6 @@
             <a:avLst/>
           </a:prstGeom>
           <a:noFill/>
-          <a:ln/>
         </p:spPr>
         <p:txBody>
           <a:bodyPr wrap="square" rtlCol="0" anchor="ctr"/>
@@ -7462,9 +7282,9 @@
                 <a:solidFill>
                   <a:srgbClr val="1A2E1A"/>
                 </a:solidFill>
-                <a:latin typeface="Calibri" pitchFamily="34" charset="0"/>
-                <a:ea typeface="Calibri" pitchFamily="34" charset="-122"/>
-                <a:cs typeface="Calibri" pitchFamily="34" charset="-120"/>
+                <a:latin typeface="Calibri" panose="020F0502020204030204" pitchFamily="34" charset="0"/>
+                <a:ea typeface="Calibri" panose="020F0502020204030204" pitchFamily="34" charset="-122"/>
+                <a:cs typeface="Calibri" panose="020F0502020204030204" pitchFamily="34" charset="-120"/>
               </a:rPr>
               <a:t>Referential Integrity: </a:t>
             </a:r>
@@ -7473,9 +7293,9 @@
                 <a:solidFill>
                   <a:srgbClr val="1A2E1A"/>
                 </a:solidFill>
-                <a:latin typeface="Calibri" pitchFamily="34" charset="0"/>
-                <a:ea typeface="Calibri" pitchFamily="34" charset="-122"/>
-                <a:cs typeface="Calibri" pitchFamily="34" charset="-120"/>
+                <a:latin typeface="Calibri" panose="020F0502020204030204" pitchFamily="34" charset="0"/>
+                <a:ea typeface="Calibri" panose="020F0502020204030204" pitchFamily="34" charset="-122"/>
+                <a:cs typeface="Calibri" panose="020F0502020204030204" pitchFamily="34" charset="-120"/>
               </a:rPr>
               <a:t>Deleting a PERSON cascades correctly to FARMER / OFFICIAL / WORKER subtypes</a:t>
             </a:r>
@@ -7494,9 +7314,9 @@
                 <a:solidFill>
                   <a:srgbClr val="1A2E1A"/>
                 </a:solidFill>
-                <a:latin typeface="Calibri" pitchFamily="34" charset="0"/>
-                <a:ea typeface="Calibri" pitchFamily="34" charset="-122"/>
-                <a:cs typeface="Calibri" pitchFamily="34" charset="-120"/>
+                <a:latin typeface="Calibri" panose="020F0502020204030204" pitchFamily="34" charset="0"/>
+                <a:ea typeface="Calibri" panose="020F0502020204030204" pitchFamily="34" charset="-122"/>
+                <a:cs typeface="Calibri" panose="020F0502020204030204" pitchFamily="34" charset="-120"/>
               </a:rPr>
               <a:t>Constraint Validation: </a:t>
             </a:r>
@@ -7505,9 +7325,9 @@
                 <a:solidFill>
                   <a:srgbClr val="1A2E1A"/>
                 </a:solidFill>
-                <a:latin typeface="Calibri" pitchFamily="34" charset="0"/>
-                <a:ea typeface="Calibri" pitchFamily="34" charset="-122"/>
-                <a:cs typeface="Calibri" pitchFamily="34" charset="-120"/>
+                <a:latin typeface="Calibri" panose="020F0502020204030204" pitchFamily="34" charset="0"/>
+                <a:ea typeface="Calibri" panose="020F0502020204030204" pitchFamily="34" charset="-122"/>
+                <a:cs typeface="Calibri" panose="020F0502020204030204" pitchFamily="34" charset="-120"/>
               </a:rPr>
               <a:t>Negative farm size or quantity_distributed rejected by CHECK constraint</a:t>
             </a:r>
@@ -7526,9 +7346,9 @@
                 <a:solidFill>
                   <a:srgbClr val="1A2E1A"/>
                 </a:solidFill>
-                <a:latin typeface="Calibri" pitchFamily="34" charset="0"/>
-                <a:ea typeface="Calibri" pitchFamily="34" charset="-122"/>
-                <a:cs typeface="Calibri" pitchFamily="34" charset="-120"/>
+                <a:latin typeface="Calibri" panose="020F0502020204030204" pitchFamily="34" charset="0"/>
+                <a:ea typeface="Calibri" panose="020F0502020204030204" pitchFamily="34" charset="-122"/>
+                <a:cs typeface="Calibri" panose="020F0502020204030204" pitchFamily="34" charset="-120"/>
               </a:rPr>
               <a:t>Location FK Integrity: </a:t>
             </a:r>
@@ -7537,11 +7357,11 @@
                 <a:solidFill>
                   <a:srgbClr val="1A2E1A"/>
                 </a:solidFill>
-                <a:latin typeface="Calibri" pitchFamily="34" charset="0"/>
-                <a:ea typeface="Calibri" pitchFamily="34" charset="-122"/>
-                <a:cs typeface="Calibri" pitchFamily="34" charset="-120"/>
-              </a:rPr>
-              <a:t>FARM and FARMER must reference a valid LOCATION_ID — orphan inserts blocked</a:t>
+                <a:latin typeface="Calibri" panose="020F0502020204030204" pitchFamily="34" charset="0"/>
+                <a:ea typeface="Calibri" panose="020F0502020204030204" pitchFamily="34" charset="-122"/>
+                <a:cs typeface="Calibri" panose="020F0502020204030204" pitchFamily="34" charset="-120"/>
+              </a:rPr>
+              <a:t>FARM and FARMER must reference a valid LOCATION_ID </a:t>
             </a:r>
             <a:endParaRPr lang="en-US" sz="1150" dirty="0"/>
           </a:p>
@@ -7558,9 +7378,9 @@
                 <a:solidFill>
                   <a:srgbClr val="1A2E1A"/>
                 </a:solidFill>
-                <a:latin typeface="Calibri" pitchFamily="34" charset="0"/>
-                <a:ea typeface="Calibri" pitchFamily="34" charset="-122"/>
-                <a:cs typeface="Calibri" pitchFamily="34" charset="-120"/>
+                <a:latin typeface="Calibri" panose="020F0502020204030204" pitchFamily="34" charset="0"/>
+                <a:ea typeface="Calibri" panose="020F0502020204030204" pitchFamily="34" charset="-122"/>
+                <a:cs typeface="Calibri" panose="020F0502020204030204" pitchFamily="34" charset="-120"/>
               </a:rPr>
               <a:t>Automation Accuracy: </a:t>
             </a:r>
@@ -7569,9 +7389,9 @@
                 <a:solidFill>
                   <a:srgbClr val="1A2E1A"/>
                 </a:solidFill>
-                <a:latin typeface="Calibri" pitchFamily="34" charset="0"/>
-                <a:ea typeface="Calibri" pitchFamily="34" charset="-122"/>
-                <a:cs typeface="Calibri" pitchFamily="34" charset="-120"/>
+                <a:latin typeface="Calibri" panose="020F0502020204030204" pitchFamily="34" charset="0"/>
+                <a:ea typeface="Calibri" panose="020F0502020204030204" pitchFamily="34" charset="-122"/>
+                <a:cs typeface="Calibri" panose="020F0502020204030204" pitchFamily="34" charset="-120"/>
               </a:rPr>
               <a:t>Distribution INSERT correctly decrements resource stock_quantity via trigger</a:t>
             </a:r>
@@ -7590,9 +7410,9 @@
                 <a:solidFill>
                   <a:srgbClr val="1A2E1A"/>
                 </a:solidFill>
-                <a:latin typeface="Calibri" pitchFamily="34" charset="0"/>
-                <a:ea typeface="Calibri" pitchFamily="34" charset="-122"/>
-                <a:cs typeface="Calibri" pitchFamily="34" charset="-120"/>
+                <a:latin typeface="Calibri" panose="020F0502020204030204" pitchFamily="34" charset="0"/>
+                <a:ea typeface="Calibri" panose="020F0502020204030204" pitchFamily="34" charset="-122"/>
+                <a:cs typeface="Calibri" panose="020F0502020204030204" pitchFamily="34" charset="-120"/>
               </a:rPr>
               <a:t>Out-of-Stock Guard: </a:t>
             </a:r>
@@ -7601,9 +7421,9 @@
                 <a:solidFill>
                   <a:srgbClr val="1A2E1A"/>
                 </a:solidFill>
-                <a:latin typeface="Calibri" pitchFamily="34" charset="0"/>
-                <a:ea typeface="Calibri" pitchFamily="34" charset="-122"/>
-                <a:cs typeface="Calibri" pitchFamily="34" charset="-120"/>
+                <a:latin typeface="Calibri" panose="020F0502020204030204" pitchFamily="34" charset="0"/>
+                <a:ea typeface="Calibri" panose="020F0502020204030204" pitchFamily="34" charset="-122"/>
+                <a:cs typeface="Calibri" panose="020F0502020204030204" pitchFamily="34" charset="-120"/>
               </a:rPr>
               <a:t>sp_RecordDistribution raises error when stock is insufficient</a:t>
             </a:r>
@@ -7621,7 +7441,7 @@
 
 <file path=ppt/slides/slide8.xml><?xml version="1.0" encoding="utf-8"?>
 <p:sld xmlns:a="http://schemas.openxmlformats.org/drawingml/2006/main" xmlns:r="http://schemas.openxmlformats.org/officeDocument/2006/relationships" xmlns:p="http://schemas.openxmlformats.org/presentationml/2006/main">
-  <p:cSld name="Slide 9">
+  <p:cSld>
     <p:bg>
       <p:bgPr>
         <a:solidFill>
@@ -7684,7 +7504,6 @@
             <a:avLst/>
           </a:prstGeom>
           <a:noFill/>
-          <a:ln/>
         </p:spPr>
         <p:txBody>
           <a:bodyPr wrap="square" lIns="0" tIns="0" rIns="0" bIns="0" rtlCol="0" anchor="ctr"/>
@@ -7698,9 +7517,9 @@
                 <a:solidFill>
                   <a:srgbClr val="FFFFFF"/>
                 </a:solidFill>
-                <a:latin typeface="Trebuchet MS" pitchFamily="34" charset="0"/>
-                <a:ea typeface="Trebuchet MS" pitchFamily="34" charset="-122"/>
-                <a:cs typeface="Trebuchet MS" pitchFamily="34" charset="-120"/>
+                <a:latin typeface="Trebuchet MS" panose="020B0603020202020204" pitchFamily="34" charset="0"/>
+                <a:ea typeface="Trebuchet MS" panose="020B0603020202020204" pitchFamily="34" charset="-122"/>
+                <a:cs typeface="Trebuchet MS" panose="020B0603020202020204" pitchFamily="34" charset="-120"/>
               </a:rPr>
               <a:t>7. Demonstration &amp; Results</a:t>
             </a:r>
@@ -7746,7 +7565,6 @@
             <a:avLst/>
           </a:prstGeom>
           <a:noFill/>
-          <a:ln/>
         </p:spPr>
         <p:txBody>
           <a:bodyPr wrap="square" rtlCol="0" anchor="ctr"/>
@@ -7760,9 +7578,9 @@
                 <a:solidFill>
                   <a:srgbClr val="8FAF72"/>
                 </a:solidFill>
-                <a:latin typeface="Calibri" pitchFamily="34" charset="0"/>
-                <a:ea typeface="Calibri" pitchFamily="34" charset="-122"/>
-                <a:cs typeface="Calibri" pitchFamily="34" charset="-120"/>
+                <a:latin typeface="Calibri" panose="020F0502020204030204" pitchFamily="34" charset="0"/>
+                <a:ea typeface="Calibri" panose="020F0502020204030204" pitchFamily="34" charset="-122"/>
+                <a:cs typeface="Calibri" panose="020F0502020204030204" pitchFamily="34" charset="-120"/>
               </a:rPr>
               <a:t>9 / 10</a:t>
             </a:r>
@@ -7835,7 +7653,6 @@
             <a:avLst/>
           </a:prstGeom>
           <a:noFill/>
-          <a:ln/>
         </p:spPr>
         <p:txBody>
           <a:bodyPr wrap="square" rtlCol="0" anchor="ctr"/>
@@ -7849,9 +7666,9 @@
                 <a:solidFill>
                   <a:srgbClr val="1A2E1A"/>
                 </a:solidFill>
-                <a:latin typeface="Trebuchet MS" pitchFamily="34" charset="0"/>
-                <a:ea typeface="Trebuchet MS" pitchFamily="34" charset="-122"/>
-                <a:cs typeface="Trebuchet MS" pitchFamily="34" charset="-120"/>
+                <a:latin typeface="Trebuchet MS" panose="020B0603020202020204" pitchFamily="34" charset="0"/>
+                <a:ea typeface="Trebuchet MS" panose="020B0603020202020204" pitchFamily="34" charset="-122"/>
+                <a:cs typeface="Trebuchet MS" panose="020B0603020202020204" pitchFamily="34" charset="-120"/>
               </a:rPr>
               <a:t>VIEW</a:t>
             </a:r>
@@ -7874,7 +7691,6 @@
             <a:avLst/>
           </a:prstGeom>
           <a:noFill/>
-          <a:ln/>
         </p:spPr>
         <p:txBody>
           <a:bodyPr wrap="square" rtlCol="0" anchor="ctr"/>
@@ -7888,9 +7704,9 @@
                 <a:solidFill>
                   <a:srgbClr val="6AAB3A"/>
                 </a:solidFill>
-                <a:latin typeface="Consolas" pitchFamily="34" charset="0"/>
-                <a:ea typeface="Consolas" pitchFamily="34" charset="-122"/>
-                <a:cs typeface="Consolas" pitchFamily="34" charset="-120"/>
+                <a:latin typeface="Consolas" panose="020B0609020204030204" pitchFamily="34" charset="0"/>
+                <a:ea typeface="Consolas" panose="020B0609020204030204" pitchFamily="34" charset="-122"/>
+                <a:cs typeface="Consolas" panose="020B0609020204030204" pitchFamily="34" charset="-120"/>
               </a:rPr>
               <a:t>vw_farm_inventory</a:t>
             </a:r>
@@ -7913,7 +7729,6 @@
             <a:avLst/>
           </a:prstGeom>
           <a:noFill/>
-          <a:ln/>
         </p:spPr>
         <p:txBody>
           <a:bodyPr wrap="square" rtlCol="0" anchor="ctr"/>
@@ -7927,9 +7742,9 @@
                 <a:solidFill>
                   <a:srgbClr val="C8DEB8"/>
                 </a:solidFill>
-                <a:latin typeface="Calibri" pitchFamily="34" charset="0"/>
-                <a:ea typeface="Calibri" pitchFamily="34" charset="-122"/>
-                <a:cs typeface="Calibri" pitchFamily="34" charset="-120"/>
+                <a:latin typeface="Calibri" panose="020F0502020204030204" pitchFamily="34" charset="0"/>
+                <a:ea typeface="Calibri" panose="020F0502020204030204" pitchFamily="34" charset="-122"/>
+                <a:cs typeface="Calibri" panose="020F0502020204030204" pitchFamily="34" charset="-120"/>
               </a:rPr>
               <a:t>Joins farms, resources, distributions and location data into a single readable view. Used by extension workers and officials without querying multiple tables.</a:t>
             </a:r>
@@ -8002,7 +7817,6 @@
             <a:avLst/>
           </a:prstGeom>
           <a:noFill/>
-          <a:ln/>
         </p:spPr>
         <p:txBody>
           <a:bodyPr wrap="square" rtlCol="0" anchor="ctr"/>
@@ -8016,9 +7830,9 @@
                 <a:solidFill>
                   <a:srgbClr val="1A2E1A"/>
                 </a:solidFill>
-                <a:latin typeface="Trebuchet MS" pitchFamily="34" charset="0"/>
-                <a:ea typeface="Trebuchet MS" pitchFamily="34" charset="-122"/>
-                <a:cs typeface="Trebuchet MS" pitchFamily="34" charset="-120"/>
+                <a:latin typeface="Trebuchet MS" panose="020B0603020202020204" pitchFamily="34" charset="0"/>
+                <a:ea typeface="Trebuchet MS" panose="020B0603020202020204" pitchFamily="34" charset="-122"/>
+                <a:cs typeface="Trebuchet MS" panose="020B0603020202020204" pitchFamily="34" charset="-120"/>
               </a:rPr>
               <a:t>PROCEDURE</a:t>
             </a:r>
@@ -8041,7 +7855,6 @@
             <a:avLst/>
           </a:prstGeom>
           <a:noFill/>
-          <a:ln/>
         </p:spPr>
         <p:txBody>
           <a:bodyPr wrap="square" rtlCol="0" anchor="ctr"/>
@@ -8055,9 +7868,9 @@
                 <a:solidFill>
                   <a:srgbClr val="6AAB3A"/>
                 </a:solidFill>
-                <a:latin typeface="Consolas" pitchFamily="34" charset="0"/>
-                <a:ea typeface="Consolas" pitchFamily="34" charset="-122"/>
-                <a:cs typeface="Consolas" pitchFamily="34" charset="-120"/>
+                <a:latin typeface="Consolas" panose="020B0609020204030204" pitchFamily="34" charset="0"/>
+                <a:ea typeface="Consolas" panose="020B0609020204030204" pitchFamily="34" charset="-122"/>
+                <a:cs typeface="Consolas" panose="020B0609020204030204" pitchFamily="34" charset="-120"/>
               </a:rPr>
               <a:t>sp_RecordDistribution</a:t>
             </a:r>
@@ -8080,7 +7893,6 @@
             <a:avLst/>
           </a:prstGeom>
           <a:noFill/>
-          <a:ln/>
         </p:spPr>
         <p:txBody>
           <a:bodyPr wrap="square" rtlCol="0" anchor="ctr"/>
@@ -8094,9 +7906,9 @@
                 <a:solidFill>
                   <a:srgbClr val="C8DEB8"/>
                 </a:solidFill>
-                <a:latin typeface="Calibri" pitchFamily="34" charset="0"/>
-                <a:ea typeface="Calibri" pitchFamily="34" charset="-122"/>
-                <a:cs typeface="Calibri" pitchFamily="34" charset="-120"/>
+                <a:latin typeface="Calibri" panose="020F0502020204030204" pitchFamily="34" charset="0"/>
+                <a:ea typeface="Calibri" panose="020F0502020204030204" pitchFamily="34" charset="-122"/>
+                <a:cs typeface="Calibri" panose="020F0502020204030204" pitchFamily="34" charset="-120"/>
               </a:rPr>
               <a:t>Accepts farm_id, resource_id, official_id, quantity, and date. Validates stock, inserts the distribution record, and triggers automatic stock decrement.</a:t>
             </a:r>
@@ -8169,7 +7981,6 @@
             <a:avLst/>
           </a:prstGeom>
           <a:noFill/>
-          <a:ln/>
         </p:spPr>
         <p:txBody>
           <a:bodyPr wrap="square" rtlCol="0" anchor="ctr"/>
@@ -8183,9 +7994,9 @@
                 <a:solidFill>
                   <a:srgbClr val="1A2E1A"/>
                 </a:solidFill>
-                <a:latin typeface="Trebuchet MS" pitchFamily="34" charset="0"/>
-                <a:ea typeface="Trebuchet MS" pitchFamily="34" charset="-122"/>
-                <a:cs typeface="Trebuchet MS" pitchFamily="34" charset="-120"/>
+                <a:latin typeface="Trebuchet MS" panose="020B0603020202020204" pitchFamily="34" charset="0"/>
+                <a:ea typeface="Trebuchet MS" panose="020B0603020202020204" pitchFamily="34" charset="-122"/>
+                <a:cs typeface="Trebuchet MS" panose="020B0603020202020204" pitchFamily="34" charset="-120"/>
               </a:rPr>
               <a:t>TEST SCRIPT</a:t>
             </a:r>
@@ -8208,7 +8019,6 @@
             <a:avLst/>
           </a:prstGeom>
           <a:noFill/>
-          <a:ln/>
         </p:spPr>
         <p:txBody>
           <a:bodyPr wrap="square" rtlCol="0" anchor="ctr"/>
@@ -8222,9 +8032,9 @@
                 <a:solidFill>
                   <a:srgbClr val="6AAB3A"/>
                 </a:solidFill>
-                <a:latin typeface="Consolas" pitchFamily="34" charset="0"/>
-                <a:ea typeface="Consolas" pitchFamily="34" charset="-122"/>
-                <a:cs typeface="Consolas" pitchFamily="34" charset="-120"/>
+                <a:latin typeface="Consolas" panose="020B0609020204030204" pitchFamily="34" charset="0"/>
+                <a:ea typeface="Consolas" panose="020B0609020204030204" pitchFamily="34" charset="-122"/>
+                <a:cs typeface="Consolas" panose="020B0609020204030204" pitchFamily="34" charset="-120"/>
               </a:rPr>
               <a:t>test_queries.sql</a:t>
             </a:r>
@@ -8247,7 +8057,6 @@
             <a:avLst/>
           </a:prstGeom>
           <a:noFill/>
-          <a:ln/>
         </p:spPr>
         <p:txBody>
           <a:bodyPr wrap="square" rtlCol="0" anchor="ctr"/>
@@ -8261,9 +8070,9 @@
                 <a:solidFill>
                   <a:srgbClr val="C8DEB8"/>
                 </a:solidFill>
-                <a:latin typeface="Calibri" pitchFamily="34" charset="0"/>
-                <a:ea typeface="Calibri" pitchFamily="34" charset="-122"/>
-                <a:cs typeface="Calibri" pitchFamily="34" charset="-120"/>
+                <a:latin typeface="Calibri" panose="020F0502020204030204" pitchFamily="34" charset="0"/>
+                <a:ea typeface="Calibri" panose="020F0502020204030204" pitchFamily="34" charset="-122"/>
+                <a:cs typeface="Calibri" panose="020F0502020204030204" pitchFamily="34" charset="-120"/>
               </a:rPr>
               <a:t>Validates all business rules: PERSON cascade, LOCATION FK integrity, constraint violations, trigger execution, and procedure output against expected results.</a:t>
             </a:r>
@@ -8281,7 +8090,7 @@
 
 <file path=ppt/slides/slide9.xml><?xml version="1.0" encoding="utf-8"?>
 <p:sld xmlns:a="http://schemas.openxmlformats.org/drawingml/2006/main" xmlns:r="http://schemas.openxmlformats.org/officeDocument/2006/relationships" xmlns:p="http://schemas.openxmlformats.org/presentationml/2006/main">
-  <p:cSld name="Slide 10">
+  <p:cSld>
     <p:bg>
       <p:bgPr>
         <a:solidFill>
@@ -8344,7 +8153,6 @@
             <a:avLst/>
           </a:prstGeom>
           <a:noFill/>
-          <a:ln/>
         </p:spPr>
         <p:txBody>
           <a:bodyPr wrap="square" rtlCol="0" anchor="ctr"/>
@@ -8358,9 +8166,9 @@
                 <a:solidFill>
                   <a:srgbClr val="FFFFFF"/>
                 </a:solidFill>
-                <a:latin typeface="Trebuchet MS" pitchFamily="34" charset="0"/>
-                <a:ea typeface="Trebuchet MS" pitchFamily="34" charset="-122"/>
-                <a:cs typeface="Trebuchet MS" pitchFamily="34" charset="-120"/>
+                <a:latin typeface="Trebuchet MS" panose="020B0603020202020204" pitchFamily="34" charset="0"/>
+                <a:ea typeface="Trebuchet MS" panose="020B0603020202020204" pitchFamily="34" charset="-122"/>
+                <a:cs typeface="Trebuchet MS" panose="020B0603020202020204" pitchFamily="34" charset="-120"/>
               </a:rPr>
               <a:t>Conclusion</a:t>
             </a:r>
@@ -8431,7 +8239,6 @@
             <a:avLst/>
           </a:prstGeom>
           <a:noFill/>
-          <a:ln/>
         </p:spPr>
         <p:txBody>
           <a:bodyPr wrap="square" rtlCol="0" anchor="ctr"/>
@@ -8445,9 +8252,9 @@
                 <a:solidFill>
                   <a:srgbClr val="1A2E1A"/>
                 </a:solidFill>
-                <a:latin typeface="Trebuchet MS" pitchFamily="34" charset="0"/>
-                <a:ea typeface="Trebuchet MS" pitchFamily="34" charset="-122"/>
-                <a:cs typeface="Trebuchet MS" pitchFamily="34" charset="-120"/>
+                <a:latin typeface="Trebuchet MS" panose="020B0603020202020204" pitchFamily="34" charset="0"/>
+                <a:ea typeface="Trebuchet MS" panose="020B0603020202020204" pitchFamily="34" charset="-122"/>
+                <a:cs typeface="Trebuchet MS" panose="020B0603020202020204" pitchFamily="34" charset="-120"/>
               </a:rPr>
               <a:t>1</a:t>
             </a:r>
@@ -8470,7 +8277,6 @@
             <a:avLst/>
           </a:prstGeom>
           <a:noFill/>
-          <a:ln/>
         </p:spPr>
         <p:txBody>
           <a:bodyPr wrap="square" rtlCol="0" anchor="ctr"/>
@@ -8484,9 +8290,9 @@
                 <a:solidFill>
                   <a:srgbClr val="6AAB3A"/>
                 </a:solidFill>
-                <a:latin typeface="Calibri" pitchFamily="34" charset="0"/>
-                <a:ea typeface="Calibri" pitchFamily="34" charset="-122"/>
-                <a:cs typeface="Calibri" pitchFamily="34" charset="-120"/>
+                <a:latin typeface="Calibri" panose="020F0502020204030204" pitchFamily="34" charset="0"/>
+                <a:ea typeface="Calibri" panose="020F0502020204030204" pitchFamily="34" charset="-122"/>
+                <a:cs typeface="Calibri" panose="020F0502020204030204" pitchFamily="34" charset="-120"/>
               </a:rPr>
               <a:t>Scalable Architecture  </a:t>
             </a:r>
@@ -8495,9 +8301,9 @@
                 <a:solidFill>
                   <a:srgbClr val="C8DEB8"/>
                 </a:solidFill>
-                <a:latin typeface="Calibri" pitchFamily="34" charset="0"/>
-                <a:ea typeface="Calibri" pitchFamily="34" charset="-122"/>
-                <a:cs typeface="Calibri" pitchFamily="34" charset="-120"/>
+                <a:latin typeface="Calibri" panose="020F0502020204030204" pitchFamily="34" charset="0"/>
+                <a:ea typeface="Calibri" panose="020F0502020204030204" pitchFamily="34" charset="-122"/>
+                <a:cs typeface="Calibri" panose="020F0502020204030204" pitchFamily="34" charset="-120"/>
               </a:rPr>
               <a:t>Normalized 3NF design supports nationwide rollout with minimal schema changes.</a:t>
             </a:r>
@@ -8545,7 +8351,6 @@
             <a:avLst/>
           </a:prstGeom>
           <a:noFill/>
-          <a:ln/>
         </p:spPr>
         <p:txBody>
           <a:bodyPr wrap="square" rtlCol="0" anchor="ctr"/>
@@ -8559,9 +8364,9 @@
                 <a:solidFill>
                   <a:srgbClr val="1A2E1A"/>
                 </a:solidFill>
-                <a:latin typeface="Trebuchet MS" pitchFamily="34" charset="0"/>
-                <a:ea typeface="Trebuchet MS" pitchFamily="34" charset="-122"/>
-                <a:cs typeface="Trebuchet MS" pitchFamily="34" charset="-120"/>
+                <a:latin typeface="Trebuchet MS" panose="020B0603020202020204" pitchFamily="34" charset="0"/>
+                <a:ea typeface="Trebuchet MS" panose="020B0603020202020204" pitchFamily="34" charset="-122"/>
+                <a:cs typeface="Trebuchet MS" panose="020B0603020202020204" pitchFamily="34" charset="-120"/>
               </a:rPr>
               <a:t>2</a:t>
             </a:r>
@@ -8584,7 +8389,6 @@
             <a:avLst/>
           </a:prstGeom>
           <a:noFill/>
-          <a:ln/>
         </p:spPr>
         <p:txBody>
           <a:bodyPr wrap="square" rtlCol="0" anchor="ctr"/>
@@ -8598,9 +8402,9 @@
                 <a:solidFill>
                   <a:srgbClr val="6AAB3A"/>
                 </a:solidFill>
-                <a:latin typeface="Calibri" pitchFamily="34" charset="0"/>
-                <a:ea typeface="Calibri" pitchFamily="34" charset="-122"/>
-                <a:cs typeface="Calibri" pitchFamily="34" charset="-120"/>
+                <a:latin typeface="Calibri" panose="020F0502020204030204" pitchFamily="34" charset="0"/>
+                <a:ea typeface="Calibri" panose="020F0502020204030204" pitchFamily="34" charset="-122"/>
+                <a:cs typeface="Calibri" panose="020F0502020204030204" pitchFamily="34" charset="-120"/>
               </a:rPr>
               <a:t>Robust Security  </a:t>
             </a:r>
@@ -8609,9 +8413,9 @@
                 <a:solidFill>
                   <a:srgbClr val="C8DEB8"/>
                 </a:solidFill>
-                <a:latin typeface="Calibri" pitchFamily="34" charset="0"/>
-                <a:ea typeface="Calibri" pitchFamily="34" charset="-122"/>
-                <a:cs typeface="Calibri" pitchFamily="34" charset="-120"/>
+                <a:latin typeface="Calibri" panose="020F0502020204030204" pitchFamily="34" charset="0"/>
+                <a:ea typeface="Calibri" panose="020F0502020204030204" pitchFamily="34" charset="-122"/>
+                <a:cs typeface="Calibri" panose="020F0502020204030204" pitchFamily="34" charset="-120"/>
               </a:rPr>
               <a:t>RBAC with three distinct roles limits data exposure and prevents unauthorized modifications.</a:t>
             </a:r>
@@ -8659,7 +8463,6 @@
             <a:avLst/>
           </a:prstGeom>
           <a:noFill/>
-          <a:ln/>
         </p:spPr>
         <p:txBody>
           <a:bodyPr wrap="square" rtlCol="0" anchor="ctr"/>
@@ -8673,9 +8476,9 @@
                 <a:solidFill>
                   <a:srgbClr val="1A2E1A"/>
                 </a:solidFill>
-                <a:latin typeface="Trebuchet MS" pitchFamily="34" charset="0"/>
-                <a:ea typeface="Trebuchet MS" pitchFamily="34" charset="-122"/>
-                <a:cs typeface="Trebuchet MS" pitchFamily="34" charset="-120"/>
+                <a:latin typeface="Trebuchet MS" panose="020B0603020202020204" pitchFamily="34" charset="0"/>
+                <a:ea typeface="Trebuchet MS" panose="020B0603020202020204" pitchFamily="34" charset="-122"/>
+                <a:cs typeface="Trebuchet MS" panose="020B0603020202020204" pitchFamily="34" charset="-120"/>
               </a:rPr>
               <a:t>3</a:t>
             </a:r>
@@ -8698,7 +8501,6 @@
             <a:avLst/>
           </a:prstGeom>
           <a:noFill/>
-          <a:ln/>
         </p:spPr>
         <p:txBody>
           <a:bodyPr wrap="square" rtlCol="0" anchor="ctr"/>
@@ -8712,9 +8514,9 @@
                 <a:solidFill>
                   <a:srgbClr val="6AAB3A"/>
                 </a:solidFill>
-                <a:latin typeface="Calibri" pitchFamily="34" charset="0"/>
-                <a:ea typeface="Calibri" pitchFamily="34" charset="-122"/>
-                <a:cs typeface="Calibri" pitchFamily="34" charset="-120"/>
+                <a:latin typeface="Calibri" panose="020F0502020204030204" pitchFamily="34" charset="0"/>
+                <a:ea typeface="Calibri" panose="020F0502020204030204" pitchFamily="34" charset="-122"/>
+                <a:cs typeface="Calibri" panose="020F0502020204030204" pitchFamily="34" charset="-120"/>
               </a:rPr>
               <a:t>Automated Inventory  </a:t>
             </a:r>
@@ -8723,9 +8525,9 @@
                 <a:solidFill>
                   <a:srgbClr val="C8DEB8"/>
                 </a:solidFill>
-                <a:latin typeface="Calibri" pitchFamily="34" charset="0"/>
-                <a:ea typeface="Calibri" pitchFamily="34" charset="-122"/>
-                <a:cs typeface="Calibri" pitchFamily="34" charset="-120"/>
+                <a:latin typeface="Calibri" panose="020F0502020204030204" pitchFamily="34" charset="0"/>
+                <a:ea typeface="Calibri" panose="020F0502020204030204" pitchFamily="34" charset="-122"/>
+                <a:cs typeface="Calibri" panose="020F0502020204030204" pitchFamily="34" charset="-120"/>
               </a:rPr>
               <a:t>Trigger-driven stock management eliminates manual updates and reduces waste.</a:t>
             </a:r>
@@ -8773,7 +8575,6 @@
             <a:avLst/>
           </a:prstGeom>
           <a:noFill/>
-          <a:ln/>
         </p:spPr>
         <p:txBody>
           <a:bodyPr wrap="square" rtlCol="0" anchor="ctr"/>
@@ -8787,9 +8588,9 @@
                 <a:solidFill>
                   <a:srgbClr val="1A2E1A"/>
                 </a:solidFill>
-                <a:latin typeface="Trebuchet MS" pitchFamily="34" charset="0"/>
-                <a:ea typeface="Trebuchet MS" pitchFamily="34" charset="-122"/>
-                <a:cs typeface="Trebuchet MS" pitchFamily="34" charset="-120"/>
+                <a:latin typeface="Trebuchet MS" panose="020B0603020202020204" pitchFamily="34" charset="0"/>
+                <a:ea typeface="Trebuchet MS" panose="020B0603020202020204" pitchFamily="34" charset="-122"/>
+                <a:cs typeface="Trebuchet MS" panose="020B0603020202020204" pitchFamily="34" charset="-120"/>
               </a:rPr>
               <a:t>4</a:t>
             </a:r>
@@ -8812,7 +8613,6 @@
             <a:avLst/>
           </a:prstGeom>
           <a:noFill/>
-          <a:ln/>
         </p:spPr>
         <p:txBody>
           <a:bodyPr wrap="square" rtlCol="0" anchor="ctr"/>
@@ -8826,9 +8626,9 @@
                 <a:solidFill>
                   <a:srgbClr val="6AAB3A"/>
                 </a:solidFill>
-                <a:latin typeface="Calibri" pitchFamily="34" charset="0"/>
-                <a:ea typeface="Calibri" pitchFamily="34" charset="-122"/>
-                <a:cs typeface="Calibri" pitchFamily="34" charset="-120"/>
+                <a:latin typeface="Calibri" panose="020F0502020204030204" pitchFamily="34" charset="0"/>
+                <a:ea typeface="Calibri" panose="020F0502020204030204" pitchFamily="34" charset="-122"/>
+                <a:cs typeface="Calibri" panose="020F0502020204030204" pitchFamily="34" charset="-120"/>
               </a:rPr>
               <a:t>Data Integrity  </a:t>
             </a:r>
@@ -8837,9 +8637,9 @@
                 <a:solidFill>
                   <a:srgbClr val="C8DEB8"/>
                 </a:solidFill>
-                <a:latin typeface="Calibri" pitchFamily="34" charset="0"/>
-                <a:ea typeface="Calibri" pitchFamily="34" charset="-122"/>
-                <a:cs typeface="Calibri" pitchFamily="34" charset="-120"/>
+                <a:latin typeface="Calibri" panose="020F0502020204030204" pitchFamily="34" charset="0"/>
+                <a:ea typeface="Calibri" panose="020F0502020204030204" pitchFamily="34" charset="-122"/>
+                <a:cs typeface="Calibri" panose="020F0502020204030204" pitchFamily="34" charset="-120"/>
               </a:rPr>
               <a:t>Primary/Foreign keys, CHECK constraints, and CASCADE rules guarantee consistent records.</a:t>
             </a:r>
@@ -8887,7 +8687,6 @@
             <a:avLst/>
           </a:prstGeom>
           <a:noFill/>
-          <a:ln/>
         </p:spPr>
         <p:txBody>
           <a:bodyPr wrap="square" rtlCol="0" anchor="ctr"/>
@@ -8901,9 +8700,9 @@
                 <a:solidFill>
                   <a:srgbClr val="1A2E1A"/>
                 </a:solidFill>
-                <a:latin typeface="Trebuchet MS" pitchFamily="34" charset="0"/>
-                <a:ea typeface="Trebuchet MS" pitchFamily="34" charset="-122"/>
-                <a:cs typeface="Trebuchet MS" pitchFamily="34" charset="-120"/>
+                <a:latin typeface="Trebuchet MS" panose="020B0603020202020204" pitchFamily="34" charset="0"/>
+                <a:ea typeface="Trebuchet MS" panose="020B0603020202020204" pitchFamily="34" charset="-122"/>
+                <a:cs typeface="Trebuchet MS" panose="020B0603020202020204" pitchFamily="34" charset="-120"/>
               </a:rPr>
               <a:t>5</a:t>
             </a:r>
@@ -8926,7 +8725,6 @@
             <a:avLst/>
           </a:prstGeom>
           <a:noFill/>
-          <a:ln/>
         </p:spPr>
         <p:txBody>
           <a:bodyPr wrap="square" rtlCol="0" anchor="ctr"/>
@@ -8940,9 +8738,9 @@
                 <a:solidFill>
                   <a:srgbClr val="6AAB3A"/>
                 </a:solidFill>
-                <a:latin typeface="Calibri" pitchFamily="34" charset="0"/>
-                <a:ea typeface="Calibri" pitchFamily="34" charset="-122"/>
-                <a:cs typeface="Calibri" pitchFamily="34" charset="-120"/>
+                <a:latin typeface="Calibri" panose="020F0502020204030204" pitchFamily="34" charset="0"/>
+                <a:ea typeface="Calibri" panose="020F0502020204030204" pitchFamily="34" charset="-122"/>
+                <a:cs typeface="Calibri" panose="020F0502020204030204" pitchFamily="34" charset="-120"/>
               </a:rPr>
               <a:t>Operational Efficiency  </a:t>
             </a:r>
@@ -8951,9 +8749,9 @@
                 <a:solidFill>
                   <a:srgbClr val="C8DEB8"/>
                 </a:solidFill>
-                <a:latin typeface="Calibri" pitchFamily="34" charset="0"/>
-                <a:ea typeface="Calibri" pitchFamily="34" charset="-122"/>
-                <a:cs typeface="Calibri" pitchFamily="34" charset="-120"/>
+                <a:latin typeface="Calibri" panose="020F0502020204030204" pitchFamily="34" charset="0"/>
+                <a:ea typeface="Calibri" panose="020F0502020204030204" pitchFamily="34" charset="-122"/>
+                <a:cs typeface="Calibri" panose="020F0502020204030204" pitchFamily="34" charset="-120"/>
               </a:rPr>
               <a:t>Views and stored procedures simplify day-to-day tasks for non-technical Ministry staff.</a:t>
             </a:r>
@@ -9001,7 +8799,6 @@
             <a:avLst/>
           </a:prstGeom>
           <a:noFill/>
-          <a:ln/>
         </p:spPr>
         <p:txBody>
           <a:bodyPr wrap="square" rtlCol="0" anchor="ctr"/>
@@ -9015,9 +8812,9 @@
                 <a:solidFill>
                   <a:srgbClr val="FFFFFF"/>
                 </a:solidFill>
-                <a:latin typeface="Trebuchet MS" pitchFamily="34" charset="0"/>
-                <a:ea typeface="Trebuchet MS" pitchFamily="34" charset="-122"/>
-                <a:cs typeface="Trebuchet MS" pitchFamily="34" charset="-120"/>
+                <a:latin typeface="Trebuchet MS" panose="020B0603020202020204" pitchFamily="34" charset="0"/>
+                <a:ea typeface="Trebuchet MS" panose="020B0603020202020204" pitchFamily="34" charset="-122"/>
+                <a:cs typeface="Trebuchet MS" panose="020B0603020202020204" pitchFamily="34" charset="-120"/>
               </a:rPr>
               <a:t>Thank You </a:t>
             </a:r>
@@ -9026,9 +8823,9 @@
                 <a:solidFill>
                   <a:srgbClr val="FFFFFF"/>
                 </a:solidFill>
-                <a:latin typeface="Trebuchet MS" pitchFamily="34" charset="0"/>
-                <a:ea typeface="Trebuchet MS" pitchFamily="34" charset="-122"/>
-                <a:cs typeface="Trebuchet MS" pitchFamily="34" charset="-120"/>
+                <a:latin typeface="Trebuchet MS" panose="020B0603020202020204" pitchFamily="34" charset="0"/>
+                <a:ea typeface="Trebuchet MS" panose="020B0603020202020204" pitchFamily="34" charset="-122"/>
+                <a:cs typeface="Trebuchet MS" panose="020B0603020202020204" pitchFamily="34" charset="-120"/>
               </a:rPr>
               <a:t>.</a:t>
             </a:r>
@@ -9051,7 +8848,6 @@
             <a:avLst/>
           </a:prstGeom>
           <a:noFill/>
-          <a:ln/>
         </p:spPr>
         <p:txBody>
           <a:bodyPr wrap="square" rtlCol="0" anchor="ctr"/>
@@ -9065,9 +8861,9 @@
                 <a:solidFill>
                   <a:srgbClr val="8FAF72"/>
                 </a:solidFill>
-                <a:latin typeface="Calibri" pitchFamily="34" charset="0"/>
-                <a:ea typeface="Calibri" pitchFamily="34" charset="-122"/>
-                <a:cs typeface="Calibri" pitchFamily="34" charset="-120"/>
+                <a:latin typeface="Calibri" panose="020F0502020204030204" pitchFamily="34" charset="0"/>
+                <a:ea typeface="Calibri" panose="020F0502020204030204" pitchFamily="34" charset="-122"/>
+                <a:cs typeface="Calibri" panose="020F0502020204030204" pitchFamily="34" charset="-120"/>
               </a:rPr>
               <a:t>10 / 10</a:t>
             </a:r>
@@ -9081,6 +8877,78 @@
     <a:masterClrMapping/>
   </p:clrMapOvr>
 </p:sld>
+</file>
+
+<file path=ppt/tags/tag1.xml><?xml version="1.0" encoding="utf-8"?>
+<p:tagLst xmlns:p="http://schemas.openxmlformats.org/presentationml/2006/main">
+  <p:tag name="KSO_WM_DIAGRAM_VIRTUALLY_FRAME" val="{&quot;height&quot;:266.4,&quot;left&quot;:36,&quot;top&quot;:104.4,&quot;width&quot;:648.72}"/>
+</p:tagLst>
+</file>
+
+<file path=ppt/tags/tag10.xml><?xml version="1.0" encoding="utf-8"?>
+<p:tagLst xmlns:p="http://schemas.openxmlformats.org/presentationml/2006/main">
+  <p:tag name="KSO_WM_DIAGRAM_VIRTUALLY_FRAME" val="{&quot;height&quot;:266.4,&quot;left&quot;:36,&quot;top&quot;:104.4,&quot;width&quot;:648.72}"/>
+</p:tagLst>
+</file>
+
+<file path=ppt/tags/tag11.xml><?xml version="1.0" encoding="utf-8"?>
+<p:tagLst xmlns:p="http://schemas.openxmlformats.org/presentationml/2006/main">
+  <p:tag name="KSO_WM_DIAGRAM_VIRTUALLY_FRAME" val="{&quot;height&quot;:266.4,&quot;left&quot;:36,&quot;top&quot;:104.4,&quot;width&quot;:648.72}"/>
+</p:tagLst>
+</file>
+
+<file path=ppt/tags/tag12.xml><?xml version="1.0" encoding="utf-8"?>
+<p:tagLst xmlns:p="http://schemas.openxmlformats.org/presentationml/2006/main">
+  <p:tag name="KSO_WM_DIAGRAM_VIRTUALLY_FRAME" val="{&quot;height&quot;:266.4,&quot;left&quot;:36,&quot;top&quot;:104.4,&quot;width&quot;:648.72}"/>
+</p:tagLst>
+</file>
+
+<file path=ppt/tags/tag2.xml><?xml version="1.0" encoding="utf-8"?>
+<p:tagLst xmlns:p="http://schemas.openxmlformats.org/presentationml/2006/main">
+  <p:tag name="KSO_WM_DIAGRAM_VIRTUALLY_FRAME" val="{&quot;height&quot;:266.4,&quot;left&quot;:36,&quot;top&quot;:104.4,&quot;width&quot;:648.72}"/>
+</p:tagLst>
+</file>
+
+<file path=ppt/tags/tag3.xml><?xml version="1.0" encoding="utf-8"?>
+<p:tagLst xmlns:p="http://schemas.openxmlformats.org/presentationml/2006/main">
+  <p:tag name="KSO_WM_DIAGRAM_VIRTUALLY_FRAME" val="{&quot;height&quot;:266.4,&quot;left&quot;:36,&quot;top&quot;:104.4,&quot;width&quot;:648.72}"/>
+</p:tagLst>
+</file>
+
+<file path=ppt/tags/tag4.xml><?xml version="1.0" encoding="utf-8"?>
+<p:tagLst xmlns:p="http://schemas.openxmlformats.org/presentationml/2006/main">
+  <p:tag name="KSO_WM_DIAGRAM_VIRTUALLY_FRAME" val="{&quot;height&quot;:266.4,&quot;left&quot;:36,&quot;top&quot;:104.4,&quot;width&quot;:648.72}"/>
+</p:tagLst>
+</file>
+
+<file path=ppt/tags/tag5.xml><?xml version="1.0" encoding="utf-8"?>
+<p:tagLst xmlns:p="http://schemas.openxmlformats.org/presentationml/2006/main">
+  <p:tag name="KSO_WM_DIAGRAM_VIRTUALLY_FRAME" val="{&quot;height&quot;:266.4,&quot;left&quot;:36,&quot;top&quot;:104.4,&quot;width&quot;:648.72}"/>
+</p:tagLst>
+</file>
+
+<file path=ppt/tags/tag6.xml><?xml version="1.0" encoding="utf-8"?>
+<p:tagLst xmlns:p="http://schemas.openxmlformats.org/presentationml/2006/main">
+  <p:tag name="KSO_WM_DIAGRAM_VIRTUALLY_FRAME" val="{&quot;height&quot;:266.4,&quot;left&quot;:36,&quot;top&quot;:104.4,&quot;width&quot;:648.72}"/>
+</p:tagLst>
+</file>
+
+<file path=ppt/tags/tag7.xml><?xml version="1.0" encoding="utf-8"?>
+<p:tagLst xmlns:p="http://schemas.openxmlformats.org/presentationml/2006/main">
+  <p:tag name="KSO_WM_DIAGRAM_VIRTUALLY_FRAME" val="{&quot;height&quot;:266.4,&quot;left&quot;:36,&quot;top&quot;:104.4,&quot;width&quot;:648.72}"/>
+</p:tagLst>
+</file>
+
+<file path=ppt/tags/tag8.xml><?xml version="1.0" encoding="utf-8"?>
+<p:tagLst xmlns:p="http://schemas.openxmlformats.org/presentationml/2006/main">
+  <p:tag name="KSO_WM_DIAGRAM_VIRTUALLY_FRAME" val="{&quot;height&quot;:266.4,&quot;left&quot;:36,&quot;top&quot;:104.4,&quot;width&quot;:648.72}"/>
+</p:tagLst>
+</file>
+
+<file path=ppt/tags/tag9.xml><?xml version="1.0" encoding="utf-8"?>
+<p:tagLst xmlns:p="http://schemas.openxmlformats.org/presentationml/2006/main">
+  <p:tag name="KSO_WM_DIAGRAM_VIRTUALLY_FRAME" val="{&quot;height&quot;:266.4,&quot;left&quot;:36,&quot;top&quot;:104.4,&quot;width&quot;:648.72}"/>
+</p:tagLst>
 </file>
 
 <file path=ppt/theme/theme1.xml><?xml version="1.0" encoding="utf-8"?>
@@ -9126,302 +8994,7 @@
     </a:clrScheme>
     <a:fontScheme name="Office">
       <a:majorFont>
-        <a:latin typeface="Calibri Light" panose="020F0302020204030204"/>
-        <a:ea typeface=""/>
-        <a:cs typeface=""/>
-        <a:font script="Jpan" typeface="游ゴシック Light"/>
-        <a:font script="Hang" typeface="맑은 고딕"/>
-        <a:font script="Hans" typeface="等线 Light"/>
-        <a:font script="Hant" typeface="新細明體"/>
-        <a:font script="Arab" typeface="Times New Roman"/>
-        <a:font script="Hebr" typeface="Times New Roman"/>
-        <a:font script="Thai" typeface="Angsana New"/>
-        <a:font script="Ethi" typeface="Nyala"/>
-        <a:font script="Beng" typeface="Vrinda"/>
-        <a:font script="Gujr" typeface="Shruti"/>
-        <a:font script="Khmr" typeface="MoolBoran"/>
-        <a:font script="Knda" typeface="Tunga"/>
-        <a:font script="Guru" typeface="Raavi"/>
-        <a:font script="Cans" typeface="Euphemia"/>
-        <a:font script="Cher" typeface="Plantagenet Cherokee"/>
-        <a:font script="Yiii" typeface="Microsoft Yi Baiti"/>
-        <a:font script="Tibt" typeface="Microsoft Himalaya"/>
-        <a:font script="Thaa" typeface="MV Boli"/>
-        <a:font script="Deva" typeface="Mangal"/>
-        <a:font script="Telu" typeface="Gautami"/>
-        <a:font script="Taml" typeface="Latha"/>
-        <a:font script="Syrc" typeface="Estrangelo Edessa"/>
-        <a:font script="Orya" typeface="Kalinga"/>
-        <a:font script="Mlym" typeface="Kartika"/>
-        <a:font script="Laoo" typeface="DokChampa"/>
-        <a:font script="Sinh" typeface="Iskoola Pota"/>
-        <a:font script="Mong" typeface="Mongolian Baiti"/>
-        <a:font script="Viet" typeface="Times New Roman"/>
-        <a:font script="Uigh" typeface="Microsoft Uighur"/>
-        <a:font script="Geor" typeface="Sylfaen"/>
-        <a:font script="Armn" typeface="Arial"/>
-        <a:font script="Bugi" typeface="Leelawadee UI"/>
-        <a:font script="Bopo" typeface="Microsoft JhengHei"/>
-        <a:font script="Java" typeface="Javanese Text"/>
-        <a:font script="Lisu" typeface="Segoe UI"/>
-        <a:font script="Mymr" typeface="Myanmar Text"/>
-        <a:font script="Nkoo" typeface="Ebrima"/>
-        <a:font script="Olck" typeface="Nirmala UI"/>
-        <a:font script="Osma" typeface="Ebrima"/>
-        <a:font script="Phag" typeface="Phagspa"/>
-        <a:font script="Syrn" typeface="Estrangelo Edessa"/>
-        <a:font script="Syrj" typeface="Estrangelo Edessa"/>
-        <a:font script="Syre" typeface="Estrangelo Edessa"/>
-        <a:font script="Sora" typeface="Nirmala UI"/>
-        <a:font script="Tale" typeface="Microsoft Tai Le"/>
-        <a:font script="Talu" typeface="Microsoft New Tai Lue"/>
-        <a:font script="Tfng" typeface="Ebrima"/>
-      </a:majorFont>
-      <a:minorFont>
-        <a:latin typeface="Calibri" panose="020F0502020204030204"/>
-        <a:ea typeface=""/>
-        <a:cs typeface=""/>
-        <a:font script="Jpan" typeface="游ゴシック"/>
-        <a:font script="Hang" typeface="맑은 고딕"/>
-        <a:font script="Hans" typeface="等线"/>
-        <a:font script="Hant" typeface="新細明體"/>
-        <a:font script="Arab" typeface="Arial"/>
-        <a:font script="Hebr" typeface="Arial"/>
-        <a:font script="Thai" typeface="Cordia New"/>
-        <a:font script="Ethi" typeface="Nyala"/>
-        <a:font script="Beng" typeface="Vrinda"/>
-        <a:font script="Gujr" typeface="Shruti"/>
-        <a:font script="Khmr" typeface="DaunPenh"/>
-        <a:font script="Knda" typeface="Tunga"/>
-        <a:font script="Guru" typeface="Raavi"/>
-        <a:font script="Cans" typeface="Euphemia"/>
-        <a:font script="Cher" typeface="Plantagenet Cherokee"/>
-        <a:font script="Yiii" typeface="Microsoft Yi Baiti"/>
-        <a:font script="Tibt" typeface="Microsoft Himalaya"/>
-        <a:font script="Thaa" typeface="MV Boli"/>
-        <a:font script="Deva" typeface="Mangal"/>
-        <a:font script="Telu" typeface="Gautami"/>
-        <a:font script="Taml" typeface="Latha"/>
-        <a:font script="Syrc" typeface="Estrangelo Edessa"/>
-        <a:font script="Orya" typeface="Kalinga"/>
-        <a:font script="Mlym" typeface="Kartika"/>
-        <a:font script="Laoo" typeface="DokChampa"/>
-        <a:font script="Sinh" typeface="Iskoola Pota"/>
-        <a:font script="Mong" typeface="Mongolian Baiti"/>
-        <a:font script="Viet" typeface="Arial"/>
-        <a:font script="Uigh" typeface="Microsoft Uighur"/>
-        <a:font script="Geor" typeface="Sylfaen"/>
-        <a:font script="Armn" typeface="Arial"/>
-        <a:font script="Bugi" typeface="Leelawadee UI"/>
-        <a:font script="Bopo" typeface="Microsoft JhengHei"/>
-        <a:font script="Java" typeface="Javanese Text"/>
-        <a:font script="Lisu" typeface="Segoe UI"/>
-        <a:font script="Mymr" typeface="Myanmar Text"/>
-        <a:font script="Nkoo" typeface="Ebrima"/>
-        <a:font script="Olck" typeface="Nirmala UI"/>
-        <a:font script="Osma" typeface="Ebrima"/>
-        <a:font script="Phag" typeface="Phagspa"/>
-        <a:font script="Syrn" typeface="Estrangelo Edessa"/>
-        <a:font script="Syrj" typeface="Estrangelo Edessa"/>
-        <a:font script="Syre" typeface="Estrangelo Edessa"/>
-        <a:font script="Sora" typeface="Nirmala UI"/>
-        <a:font script="Tale" typeface="Microsoft Tai Le"/>
-        <a:font script="Talu" typeface="Microsoft New Tai Lue"/>
-        <a:font script="Tfng" typeface="Ebrima"/>
-      </a:minorFont>
-    </a:fontScheme>
-    <a:fmtScheme name="Office">
-      <a:fillStyleLst>
-        <a:solidFill>
-          <a:schemeClr val="phClr"/>
-        </a:solidFill>
-        <a:gradFill rotWithShape="1">
-          <a:gsLst>
-            <a:gs pos="0">
-              <a:schemeClr val="phClr">
-                <a:lumMod val="110000"/>
-                <a:satMod val="105000"/>
-                <a:tint val="67000"/>
-              </a:schemeClr>
-            </a:gs>
-            <a:gs pos="50000">
-              <a:schemeClr val="phClr">
-                <a:lumMod val="105000"/>
-                <a:satMod val="103000"/>
-                <a:tint val="73000"/>
-              </a:schemeClr>
-            </a:gs>
-            <a:gs pos="100000">
-              <a:schemeClr val="phClr">
-                <a:lumMod val="105000"/>
-                <a:satMod val="109000"/>
-                <a:tint val="81000"/>
-              </a:schemeClr>
-            </a:gs>
-          </a:gsLst>
-          <a:lin ang="5400000" scaled="0"/>
-        </a:gradFill>
-        <a:gradFill rotWithShape="1">
-          <a:gsLst>
-            <a:gs pos="0">
-              <a:schemeClr val="phClr">
-                <a:satMod val="103000"/>
-                <a:lumMod val="102000"/>
-                <a:tint val="94000"/>
-              </a:schemeClr>
-            </a:gs>
-            <a:gs pos="50000">
-              <a:schemeClr val="phClr">
-                <a:satMod val="110000"/>
-                <a:lumMod val="100000"/>
-                <a:shade val="100000"/>
-              </a:schemeClr>
-            </a:gs>
-            <a:gs pos="100000">
-              <a:schemeClr val="phClr">
-                <a:lumMod val="99000"/>
-                <a:satMod val="120000"/>
-                <a:shade val="78000"/>
-              </a:schemeClr>
-            </a:gs>
-          </a:gsLst>
-          <a:lin ang="5400000" scaled="0"/>
-        </a:gradFill>
-      </a:fillStyleLst>
-      <a:lnStyleLst>
-        <a:ln w="6350" cap="flat" cmpd="sng" algn="ctr">
-          <a:solidFill>
-            <a:schemeClr val="phClr"/>
-          </a:solidFill>
-          <a:prstDash val="solid"/>
-          <a:miter lim="800000"/>
-        </a:ln>
-        <a:ln w="12700" cap="flat" cmpd="sng" algn="ctr">
-          <a:solidFill>
-            <a:schemeClr val="phClr"/>
-          </a:solidFill>
-          <a:prstDash val="solid"/>
-          <a:miter lim="800000"/>
-        </a:ln>
-        <a:ln w="19050" cap="flat" cmpd="sng" algn="ctr">
-          <a:solidFill>
-            <a:schemeClr val="phClr"/>
-          </a:solidFill>
-          <a:prstDash val="solid"/>
-          <a:miter lim="800000"/>
-        </a:ln>
-      </a:lnStyleLst>
-      <a:effectStyleLst>
-        <a:effectStyle>
-          <a:effectLst/>
-        </a:effectStyle>
-        <a:effectStyle>
-          <a:effectLst/>
-        </a:effectStyle>
-        <a:effectStyle>
-          <a:effectLst>
-            <a:outerShdw blurRad="57150" dist="19050" dir="5400000" algn="ctr" rotWithShape="0">
-              <a:srgbClr val="000000">
-                <a:alpha val="63000"/>
-              </a:srgbClr>
-            </a:outerShdw>
-          </a:effectLst>
-        </a:effectStyle>
-      </a:effectStyleLst>
-      <a:bgFillStyleLst>
-        <a:solidFill>
-          <a:schemeClr val="phClr"/>
-        </a:solidFill>
-        <a:solidFill>
-          <a:schemeClr val="phClr">
-            <a:tint val="95000"/>
-            <a:satMod val="170000"/>
-          </a:schemeClr>
-        </a:solidFill>
-        <a:gradFill rotWithShape="1">
-          <a:gsLst>
-            <a:gs pos="0">
-              <a:schemeClr val="phClr">
-                <a:tint val="93000"/>
-                <a:satMod val="150000"/>
-                <a:shade val="98000"/>
-                <a:lumMod val="102000"/>
-              </a:schemeClr>
-            </a:gs>
-            <a:gs pos="50000">
-              <a:schemeClr val="phClr">
-                <a:tint val="98000"/>
-                <a:satMod val="130000"/>
-                <a:shade val="90000"/>
-                <a:lumMod val="103000"/>
-              </a:schemeClr>
-            </a:gs>
-            <a:gs pos="100000">
-              <a:schemeClr val="phClr">
-                <a:shade val="63000"/>
-                <a:satMod val="120000"/>
-              </a:schemeClr>
-            </a:gs>
-          </a:gsLst>
-          <a:lin ang="5400000" scaled="0"/>
-        </a:gradFill>
-      </a:bgFillStyleLst>
-    </a:fmtScheme>
-  </a:themeElements>
-  <a:objectDefaults/>
-  <a:extraClrSchemeLst/>
-  <a:extLst>
-    <a:ext uri="{05A4C25C-085E-4340-85A3-A5531E510DB2}">
-      <thm15:themeFamily xmlns:thm15="http://schemas.microsoft.com/office/thememl/2012/main" name="Office Theme" id="{62F939B6-93AF-4DB8-9C6B-D6C7DFDC589F}" vid="{4A3C46E8-61CC-4603-A589-7422A47A8E4A}"/>
-    </a:ext>
-  </a:extLst>
-</a:theme>
-</file>
-
-<file path=ppt/theme/theme2.xml><?xml version="1.0" encoding="utf-8"?>
-<a:theme xmlns:a="http://schemas.openxmlformats.org/drawingml/2006/main" name="Office Theme">
-  <a:themeElements>
-    <a:clrScheme name="Office">
-      <a:dk1>
-        <a:sysClr val="windowText" lastClr="000000"/>
-      </a:dk1>
-      <a:lt1>
-        <a:sysClr val="window" lastClr="FFFFFF"/>
-      </a:lt1>
-      <a:dk2>
-        <a:srgbClr val="44546A"/>
-      </a:dk2>
-      <a:lt2>
-        <a:srgbClr val="E7E6E6"/>
-      </a:lt2>
-      <a:accent1>
-        <a:srgbClr val="5B9BD5"/>
-      </a:accent1>
-      <a:accent2>
-        <a:srgbClr val="ED7D31"/>
-      </a:accent2>
-      <a:accent3>
-        <a:srgbClr val="A5A5A5"/>
-      </a:accent3>
-      <a:accent4>
-        <a:srgbClr val="FFC000"/>
-      </a:accent4>
-      <a:accent5>
-        <a:srgbClr val="4472C4"/>
-      </a:accent5>
-      <a:accent6>
-        <a:srgbClr val="70AD47"/>
-      </a:accent6>
-      <a:hlink>
-        <a:srgbClr val="0563C1"/>
-      </a:hlink>
-      <a:folHlink>
-        <a:srgbClr val="954F72"/>
-      </a:folHlink>
-    </a:clrScheme>
-    <a:fontScheme name="Office">
-      <a:majorFont>
-        <a:latin typeface="Calibri Light" panose="020F0302020204030204"/>
+        <a:latin typeface="Calibri Light"/>
         <a:ea typeface=""/>
         <a:cs typeface=""/>
         <a:font script="Jpan" typeface="游ゴシック Light"/>
@@ -9456,7 +9029,7 @@
         <a:font script="Geor" typeface="Sylfaen"/>
       </a:majorFont>
       <a:minorFont>
-        <a:latin typeface="Calibri" panose="020F0502020204030204"/>
+        <a:latin typeface="Calibri"/>
         <a:ea typeface=""/>
         <a:cs typeface=""/>
         <a:font script="Jpan" typeface="游ゴシック"/>
@@ -9629,8 +9202,265 @@
       </a:bgFillStyleLst>
     </a:fmtScheme>
   </a:themeElements>
-  <a:objectDefaults/>
-  <a:extraClrSchemeLst/>
+  <a:extLst>
+    <a:ext uri="{05A4C25C-085E-4340-85A3-A5531E510DB2}">
+      <thm15:themeFamily xmlns:thm15="http://schemas.microsoft.com/office/thememl/2012/main" name="Office Theme" id="{62F939B6-93AF-4DB8-9C6B-D6C7DFDC589F}" vid="{4A3C46E8-61CC-4603-A589-7422A47A8E4A}"/>
+    </a:ext>
+  </a:extLst>
+</a:theme>
+</file>
+
+<file path=ppt/theme/theme2.xml><?xml version="1.0" encoding="utf-8"?>
+<a:theme xmlns:a="http://schemas.openxmlformats.org/drawingml/2006/main" name="Office Theme">
+  <a:themeElements>
+    <a:clrScheme name="Office">
+      <a:dk1>
+        <a:sysClr val="windowText" lastClr="000000"/>
+      </a:dk1>
+      <a:lt1>
+        <a:sysClr val="window" lastClr="FFFFFF"/>
+      </a:lt1>
+      <a:dk2>
+        <a:srgbClr val="44546A"/>
+      </a:dk2>
+      <a:lt2>
+        <a:srgbClr val="E7E6E6"/>
+      </a:lt2>
+      <a:accent1>
+        <a:srgbClr val="5B9BD5"/>
+      </a:accent1>
+      <a:accent2>
+        <a:srgbClr val="ED7D31"/>
+      </a:accent2>
+      <a:accent3>
+        <a:srgbClr val="A5A5A5"/>
+      </a:accent3>
+      <a:accent4>
+        <a:srgbClr val="FFC000"/>
+      </a:accent4>
+      <a:accent5>
+        <a:srgbClr val="4472C4"/>
+      </a:accent5>
+      <a:accent6>
+        <a:srgbClr val="70AD47"/>
+      </a:accent6>
+      <a:hlink>
+        <a:srgbClr val="0563C1"/>
+      </a:hlink>
+      <a:folHlink>
+        <a:srgbClr val="954F72"/>
+      </a:folHlink>
+    </a:clrScheme>
+    <a:fontScheme name="Office">
+      <a:majorFont>
+        <a:latin typeface="Calibri Light"/>
+        <a:ea typeface=""/>
+        <a:cs typeface=""/>
+        <a:font script="Jpan" typeface="游ゴシック Light"/>
+        <a:font script="Hang" typeface="맑은 고딕"/>
+        <a:font script="Hans" typeface="等线 Light"/>
+        <a:font script="Hant" typeface="新細明體"/>
+        <a:font script="Arab" typeface="Times New Roman"/>
+        <a:font script="Hebr" typeface="Times New Roman"/>
+        <a:font script="Thai" typeface="Angsana New"/>
+        <a:font script="Ethi" typeface="Nyala"/>
+        <a:font script="Beng" typeface="Vrinda"/>
+        <a:font script="Gujr" typeface="Shruti"/>
+        <a:font script="Khmr" typeface="MoolBoran"/>
+        <a:font script="Knda" typeface="Tunga"/>
+        <a:font script="Guru" typeface="Raavi"/>
+        <a:font script="Cans" typeface="Euphemia"/>
+        <a:font script="Cher" typeface="Plantagenet Cherokee"/>
+        <a:font script="Yiii" typeface="Microsoft Yi Baiti"/>
+        <a:font script="Tibt" typeface="Microsoft Himalaya"/>
+        <a:font script="Thaa" typeface="MV Boli"/>
+        <a:font script="Deva" typeface="Mangal"/>
+        <a:font script="Telu" typeface="Gautami"/>
+        <a:font script="Taml" typeface="Latha"/>
+        <a:font script="Syrc" typeface="Estrangelo Edessa"/>
+        <a:font script="Orya" typeface="Kalinga"/>
+        <a:font script="Mlym" typeface="Kartika"/>
+        <a:font script="Laoo" typeface="DokChampa"/>
+        <a:font script="Sinh" typeface="Iskoola Pota"/>
+        <a:font script="Mong" typeface="Mongolian Baiti"/>
+        <a:font script="Viet" typeface="Times New Roman"/>
+        <a:font script="Uigh" typeface="Microsoft Uighur"/>
+        <a:font script="Geor" typeface="Sylfaen"/>
+      </a:majorFont>
+      <a:minorFont>
+        <a:latin typeface="Calibri"/>
+        <a:ea typeface=""/>
+        <a:cs typeface=""/>
+        <a:font script="Jpan" typeface="游ゴシック"/>
+        <a:font script="Hang" typeface="맑은 고딕"/>
+        <a:font script="Hans" typeface="等线"/>
+        <a:font script="Hant" typeface="新細明體"/>
+        <a:font script="Arab" typeface="Arial"/>
+        <a:font script="Hebr" typeface="Arial"/>
+        <a:font script="Thai" typeface="Cordia New"/>
+        <a:font script="Ethi" typeface="Nyala"/>
+        <a:font script="Beng" typeface="Vrinda"/>
+        <a:font script="Gujr" typeface="Shruti"/>
+        <a:font script="Khmr" typeface="DaunPenh"/>
+        <a:font script="Knda" typeface="Tunga"/>
+        <a:font script="Guru" typeface="Raavi"/>
+        <a:font script="Cans" typeface="Euphemia"/>
+        <a:font script="Cher" typeface="Plantagenet Cherokee"/>
+        <a:font script="Yiii" typeface="Microsoft Yi Baiti"/>
+        <a:font script="Tibt" typeface="Microsoft Himalaya"/>
+        <a:font script="Thaa" typeface="MV Boli"/>
+        <a:font script="Deva" typeface="Mangal"/>
+        <a:font script="Telu" typeface="Gautami"/>
+        <a:font script="Taml" typeface="Latha"/>
+        <a:font script="Syrc" typeface="Estrangelo Edessa"/>
+        <a:font script="Orya" typeface="Kalinga"/>
+        <a:font script="Mlym" typeface="Kartika"/>
+        <a:font script="Laoo" typeface="DokChampa"/>
+        <a:font script="Sinh" typeface="Iskoola Pota"/>
+        <a:font script="Mong" typeface="Mongolian Baiti"/>
+        <a:font script="Viet" typeface="Arial"/>
+        <a:font script="Uigh" typeface="Microsoft Uighur"/>
+        <a:font script="Geor" typeface="Sylfaen"/>
+      </a:minorFont>
+    </a:fontScheme>
+    <a:fmtScheme name="Office">
+      <a:fillStyleLst>
+        <a:solidFill>
+          <a:schemeClr val="phClr"/>
+        </a:solidFill>
+        <a:gradFill rotWithShape="1">
+          <a:gsLst>
+            <a:gs pos="0">
+              <a:schemeClr val="phClr">
+                <a:lumMod val="110000"/>
+                <a:satMod val="105000"/>
+                <a:tint val="67000"/>
+              </a:schemeClr>
+            </a:gs>
+            <a:gs pos="50000">
+              <a:schemeClr val="phClr">
+                <a:lumMod val="105000"/>
+                <a:satMod val="103000"/>
+                <a:tint val="73000"/>
+              </a:schemeClr>
+            </a:gs>
+            <a:gs pos="100000">
+              <a:schemeClr val="phClr">
+                <a:lumMod val="105000"/>
+                <a:satMod val="109000"/>
+                <a:tint val="81000"/>
+              </a:schemeClr>
+            </a:gs>
+          </a:gsLst>
+          <a:lin ang="5400000" scaled="0"/>
+        </a:gradFill>
+        <a:gradFill rotWithShape="1">
+          <a:gsLst>
+            <a:gs pos="0">
+              <a:schemeClr val="phClr">
+                <a:satMod val="103000"/>
+                <a:lumMod val="102000"/>
+                <a:tint val="94000"/>
+              </a:schemeClr>
+            </a:gs>
+            <a:gs pos="50000">
+              <a:schemeClr val="phClr">
+                <a:satMod val="110000"/>
+                <a:lumMod val="100000"/>
+                <a:shade val="100000"/>
+              </a:schemeClr>
+            </a:gs>
+            <a:gs pos="100000">
+              <a:schemeClr val="phClr">
+                <a:lumMod val="99000"/>
+                <a:satMod val="120000"/>
+                <a:shade val="78000"/>
+              </a:schemeClr>
+            </a:gs>
+          </a:gsLst>
+          <a:lin ang="5400000" scaled="0"/>
+        </a:gradFill>
+      </a:fillStyleLst>
+      <a:lnStyleLst>
+        <a:ln w="6350" cap="flat" cmpd="sng" algn="ctr">
+          <a:solidFill>
+            <a:schemeClr val="phClr"/>
+          </a:solidFill>
+          <a:prstDash val="solid"/>
+          <a:miter lim="800000"/>
+        </a:ln>
+        <a:ln w="12700" cap="flat" cmpd="sng" algn="ctr">
+          <a:solidFill>
+            <a:schemeClr val="phClr"/>
+          </a:solidFill>
+          <a:prstDash val="solid"/>
+          <a:miter lim="800000"/>
+        </a:ln>
+        <a:ln w="19050" cap="flat" cmpd="sng" algn="ctr">
+          <a:solidFill>
+            <a:schemeClr val="phClr"/>
+          </a:solidFill>
+          <a:prstDash val="solid"/>
+          <a:miter lim="800000"/>
+        </a:ln>
+      </a:lnStyleLst>
+      <a:effectStyleLst>
+        <a:effectStyle>
+          <a:effectLst/>
+        </a:effectStyle>
+        <a:effectStyle>
+          <a:effectLst/>
+        </a:effectStyle>
+        <a:effectStyle>
+          <a:effectLst>
+            <a:outerShdw blurRad="57150" dist="19050" dir="5400000" algn="ctr" rotWithShape="0">
+              <a:srgbClr val="000000">
+                <a:alpha val="63000"/>
+              </a:srgbClr>
+            </a:outerShdw>
+          </a:effectLst>
+        </a:effectStyle>
+      </a:effectStyleLst>
+      <a:bgFillStyleLst>
+        <a:solidFill>
+          <a:schemeClr val="phClr"/>
+        </a:solidFill>
+        <a:solidFill>
+          <a:schemeClr val="phClr">
+            <a:tint val="95000"/>
+            <a:satMod val="170000"/>
+          </a:schemeClr>
+        </a:solidFill>
+        <a:gradFill rotWithShape="1">
+          <a:gsLst>
+            <a:gs pos="0">
+              <a:schemeClr val="phClr">
+                <a:tint val="93000"/>
+                <a:satMod val="150000"/>
+                <a:shade val="98000"/>
+                <a:lumMod val="102000"/>
+              </a:schemeClr>
+            </a:gs>
+            <a:gs pos="50000">
+              <a:schemeClr val="phClr">
+                <a:tint val="98000"/>
+                <a:satMod val="130000"/>
+                <a:shade val="90000"/>
+                <a:lumMod val="103000"/>
+              </a:schemeClr>
+            </a:gs>
+            <a:gs pos="100000">
+              <a:schemeClr val="phClr">
+                <a:shade val="63000"/>
+                <a:satMod val="120000"/>
+              </a:schemeClr>
+            </a:gs>
+          </a:gsLst>
+          <a:lin ang="5400000" scaled="0"/>
+        </a:gradFill>
+      </a:bgFillStyleLst>
+    </a:fmtScheme>
+  </a:themeElements>
   <a:extLst>
     <a:ext uri="{05A4C25C-085E-4340-85A3-A5531E510DB2}">
       <thm15:themeFamily xmlns:thm15="http://schemas.microsoft.com/office/thememl/2012/main" name="Office Theme" id="{62F939B6-93AF-4DB8-9C6B-D6C7DFDC589F}" vid="{4A3C46E8-61CC-4603-A589-7422A47A8E4A}"/>
